--- a/1.training_model/slide_presentation/Device Identifier 20260520.pptx
+++ b/1.training_model/slide_presentation/Device Identifier 20260520.pptx
@@ -5,12 +5,13 @@
     <p:sldMasterId id="2147483696" r:id="rId1"/>
   </p:sldMasterIdLst>
   <p:notesMasterIdLst>
-    <p:notesMasterId r:id="rId5"/>
+    <p:notesMasterId r:id="rId6"/>
   </p:notesMasterIdLst>
   <p:sldIdLst>
     <p:sldId id="256" r:id="rId2"/>
-    <p:sldId id="292" r:id="rId3"/>
-    <p:sldId id="323" r:id="rId4"/>
+    <p:sldId id="325" r:id="rId3"/>
+    <p:sldId id="292" r:id="rId4"/>
+    <p:sldId id="323" r:id="rId5"/>
   </p:sldIdLst>
   <p:sldSz cx="12192000" cy="6858000"/>
   <p:notesSz cx="6858000" cy="9144000"/>
@@ -556,6 +557,90 @@
   <p:cSld>
     <p:spTree>
       <p:nvGrpSpPr>
+        <p:cNvPr id="1" name=""/>
+        <p:cNvGrpSpPr/>
+        <p:nvPr/>
+      </p:nvGrpSpPr>
+      <p:grpSpPr>
+        <a:xfrm>
+          <a:off x="0" y="0"/>
+          <a:ext cx="0" cy="0"/>
+          <a:chOff x="0" y="0"/>
+          <a:chExt cx="0" cy="0"/>
+        </a:xfrm>
+      </p:grpSpPr>
+      <p:sp>
+        <p:nvSpPr>
+          <p:cNvPr id="2" name="Slide Image Placeholder 1"/>
+          <p:cNvSpPr>
+            <a:spLocks noGrp="1" noRot="1" noChangeAspect="1"/>
+          </p:cNvSpPr>
+          <p:nvPr>
+            <p:ph type="sldImg"/>
+          </p:nvPr>
+        </p:nvSpPr>
+        <p:spPr/>
+      </p:sp>
+      <p:sp>
+        <p:nvSpPr>
+          <p:cNvPr id="3" name="Notes Placeholder 2"/>
+          <p:cNvSpPr>
+            <a:spLocks noGrp="1"/>
+          </p:cNvSpPr>
+          <p:nvPr>
+            <p:ph type="body" idx="1"/>
+          </p:nvPr>
+        </p:nvSpPr>
+        <p:spPr/>
+        <p:txBody>
+          <a:bodyPr/>
+          <a:lstStyle/>
+          <a:p>
+            <a:endParaRPr lang="en-MY" dirty="0"/>
+          </a:p>
+        </p:txBody>
+      </p:sp>
+      <p:sp>
+        <p:nvSpPr>
+          <p:cNvPr id="4" name="Slide Number Placeholder 3"/>
+          <p:cNvSpPr>
+            <a:spLocks noGrp="1"/>
+          </p:cNvSpPr>
+          <p:nvPr>
+            <p:ph type="sldNum" sz="quarter" idx="5"/>
+          </p:nvPr>
+        </p:nvSpPr>
+        <p:spPr/>
+        <p:txBody>
+          <a:bodyPr/>
+          <a:lstStyle/>
+          <a:p>
+            <a:fld id="{D16833E0-5E66-4D1D-89F5-BD860FDD8F71}" type="slidenum">
+              <a:rPr lang="en-MY" smtClean="0"/>
+              <a:t>3</a:t>
+            </a:fld>
+            <a:endParaRPr lang="en-MY"/>
+          </a:p>
+        </p:txBody>
+      </p:sp>
+    </p:spTree>
+    <p:extLst>
+      <p:ext uri="{BB962C8B-B14F-4D97-AF65-F5344CB8AC3E}">
+        <p14:creationId xmlns:p14="http://schemas.microsoft.com/office/powerpoint/2010/main" val="2092298064"/>
+      </p:ext>
+    </p:extLst>
+  </p:cSld>
+  <p:clrMapOvr>
+    <a:masterClrMapping/>
+  </p:clrMapOvr>
+</p:notes>
+</file>
+
+<file path=ppt/notesSlides/notesSlide3.xml><?xml version="1.0" encoding="utf-8"?>
+<p:notes xmlns:a="http://schemas.openxmlformats.org/drawingml/2006/main" xmlns:r="http://schemas.openxmlformats.org/officeDocument/2006/relationships" xmlns:p="http://schemas.openxmlformats.org/presentationml/2006/main">
+  <p:cSld>
+    <p:spTree>
+      <p:nvGrpSpPr>
         <p:cNvPr id="1" name="">
           <a:extLst>
             <a:ext uri="{FF2B5EF4-FFF2-40B4-BE49-F238E27FC236}">
@@ -640,7 +725,7 @@
           <a:p>
             <a:fld id="{D16833E0-5E66-4D1D-89F5-BD860FDD8F71}" type="slidenum">
               <a:rPr lang="en-MY" smtClean="0"/>
-              <a:t>3</a:t>
+              <a:t>4</a:t>
             </a:fld>
             <a:endParaRPr lang="en-MY"/>
           </a:p>
@@ -6782,6 +6867,1866 @@
     <p:bg>
       <p:bgPr>
         <a:solidFill>
+          <a:srgbClr val="CDF6F9"/>
+        </a:solidFill>
+        <a:effectLst/>
+      </p:bgPr>
+    </p:bg>
+    <p:spTree>
+      <p:nvGrpSpPr>
+        <p:cNvPr id="1" name="">
+          <a:extLst>
+            <a:ext uri="{FF2B5EF4-FFF2-40B4-BE49-F238E27FC236}">
+              <a16:creationId xmlns:a16="http://schemas.microsoft.com/office/drawing/2014/main" id="{5ACDE19C-F5BD-B912-3E54-53724452BF82}"/>
+            </a:ext>
+          </a:extLst>
+        </p:cNvPr>
+        <p:cNvGrpSpPr/>
+        <p:nvPr/>
+      </p:nvGrpSpPr>
+      <p:grpSpPr>
+        <a:xfrm>
+          <a:off x="0" y="0"/>
+          <a:ext cx="0" cy="0"/>
+          <a:chOff x="0" y="0"/>
+          <a:chExt cx="0" cy="0"/>
+        </a:xfrm>
+      </p:grpSpPr>
+      <p:sp>
+        <p:nvSpPr>
+          <p:cNvPr id="4" name="Rectangle 3">
+            <a:extLst>
+              <a:ext uri="{FF2B5EF4-FFF2-40B4-BE49-F238E27FC236}">
+                <a16:creationId xmlns:a16="http://schemas.microsoft.com/office/drawing/2014/main" id="{1DDB410C-EA40-6A78-6A16-2CEC8DDAB8CC}"/>
+              </a:ext>
+            </a:extLst>
+          </p:cNvPr>
+          <p:cNvSpPr/>
+          <p:nvPr/>
+        </p:nvSpPr>
+        <p:spPr>
+          <a:xfrm>
+            <a:off x="5165025" y="247650"/>
+            <a:ext cx="1861951" cy="492671"/>
+          </a:xfrm>
+          <a:prstGeom prst="rect">
+            <a:avLst/>
+          </a:prstGeom>
+        </p:spPr>
+        <p:style>
+          <a:lnRef idx="2">
+            <a:schemeClr val="accent6"/>
+          </a:lnRef>
+          <a:fillRef idx="1">
+            <a:schemeClr val="lt1"/>
+          </a:fillRef>
+          <a:effectRef idx="0">
+            <a:schemeClr val="accent6"/>
+          </a:effectRef>
+          <a:fontRef idx="minor">
+            <a:schemeClr val="dk1"/>
+          </a:fontRef>
+        </p:style>
+        <p:txBody>
+          <a:bodyPr rtlCol="0" anchor="ctr"/>
+          <a:lstStyle/>
+          <a:p>
+            <a:pPr algn="ctr">
+              <a:lnSpc>
+                <a:spcPts val="1400"/>
+              </a:lnSpc>
+            </a:pPr>
+            <a:r>
+              <a:rPr lang="en-MY" b="1" dirty="0"/>
+              <a:t>INPUT</a:t>
+            </a:r>
+          </a:p>
+          <a:p>
+            <a:pPr algn="ctr">
+              <a:lnSpc>
+                <a:spcPts val="1400"/>
+              </a:lnSpc>
+            </a:pPr>
+            <a:r>
+              <a:rPr lang="en-MY" sz="1100" dirty="0"/>
+              <a:t>(Customer, Project, Device ID</a:t>
+            </a:r>
+            <a:r>
+              <a:rPr lang="en-MY" sz="1400" b="1" dirty="0"/>
+              <a:t>)</a:t>
+            </a:r>
+          </a:p>
+        </p:txBody>
+      </p:sp>
+      <p:sp>
+        <p:nvSpPr>
+          <p:cNvPr id="11" name="Rectangle 10">
+            <a:extLst>
+              <a:ext uri="{FF2B5EF4-FFF2-40B4-BE49-F238E27FC236}">
+                <a16:creationId xmlns:a16="http://schemas.microsoft.com/office/drawing/2014/main" id="{A0F783AE-E4BB-7E7F-7041-A46A51505740}"/>
+              </a:ext>
+            </a:extLst>
+          </p:cNvPr>
+          <p:cNvSpPr/>
+          <p:nvPr/>
+        </p:nvSpPr>
+        <p:spPr>
+          <a:xfrm>
+            <a:off x="4741548" y="4728283"/>
+            <a:ext cx="3186725" cy="597506"/>
+          </a:xfrm>
+          <a:prstGeom prst="rect">
+            <a:avLst/>
+          </a:prstGeom>
+        </p:spPr>
+        <p:style>
+          <a:lnRef idx="2">
+            <a:schemeClr val="accent6"/>
+          </a:lnRef>
+          <a:fillRef idx="1">
+            <a:schemeClr val="lt1"/>
+          </a:fillRef>
+          <a:effectRef idx="0">
+            <a:schemeClr val="accent6"/>
+          </a:effectRef>
+          <a:fontRef idx="minor">
+            <a:schemeClr val="dk1"/>
+          </a:fontRef>
+        </p:style>
+        <p:txBody>
+          <a:bodyPr rtlCol="0" anchor="ctr"/>
+          <a:lstStyle/>
+          <a:p>
+            <a:pPr algn="ctr"/>
+            <a:r>
+              <a:rPr lang="en-MY" b="1" dirty="0"/>
+              <a:t>RESULT OUTPUT</a:t>
+            </a:r>
+          </a:p>
+          <a:p>
+            <a:pPr algn="ctr"/>
+            <a:r>
+              <a:rPr lang="en-MY" sz="1100" dirty="0"/>
+              <a:t>(Customer, Project, Device ID, Device Type, Section)</a:t>
+            </a:r>
+          </a:p>
+        </p:txBody>
+      </p:sp>
+      <p:sp>
+        <p:nvSpPr>
+          <p:cNvPr id="12" name="Rectangle 11">
+            <a:extLst>
+              <a:ext uri="{FF2B5EF4-FFF2-40B4-BE49-F238E27FC236}">
+                <a16:creationId xmlns:a16="http://schemas.microsoft.com/office/drawing/2014/main" id="{F387876A-373C-4675-FD3D-7DB0A7CF37C8}"/>
+              </a:ext>
+            </a:extLst>
+          </p:cNvPr>
+          <p:cNvSpPr/>
+          <p:nvPr/>
+        </p:nvSpPr>
+        <p:spPr>
+          <a:xfrm>
+            <a:off x="3467858" y="2438352"/>
+            <a:ext cx="1292938" cy="236026"/>
+          </a:xfrm>
+          <a:prstGeom prst="rect">
+            <a:avLst/>
+          </a:prstGeom>
+        </p:spPr>
+        <p:style>
+          <a:lnRef idx="2">
+            <a:schemeClr val="accent6"/>
+          </a:lnRef>
+          <a:fillRef idx="1">
+            <a:schemeClr val="lt1"/>
+          </a:fillRef>
+          <a:effectRef idx="0">
+            <a:schemeClr val="accent6"/>
+          </a:effectRef>
+          <a:fontRef idx="minor">
+            <a:schemeClr val="dk1"/>
+          </a:fontRef>
+        </p:style>
+        <p:txBody>
+          <a:bodyPr rtlCol="0" anchor="ctr"/>
+          <a:lstStyle/>
+          <a:p>
+            <a:pPr algn="ctr"/>
+            <a:r>
+              <a:rPr lang="en-US" dirty="0"/>
+              <a:t>P</a:t>
+            </a:r>
+            <a:r>
+              <a:rPr lang="en-MY" dirty="0"/>
+              <a:t>REFIX</a:t>
+            </a:r>
+          </a:p>
+        </p:txBody>
+      </p:sp>
+      <p:sp>
+        <p:nvSpPr>
+          <p:cNvPr id="13" name="Rectangle 12">
+            <a:extLst>
+              <a:ext uri="{FF2B5EF4-FFF2-40B4-BE49-F238E27FC236}">
+                <a16:creationId xmlns:a16="http://schemas.microsoft.com/office/drawing/2014/main" id="{467A7917-7751-58A4-D13B-2017E2CC3231}"/>
+              </a:ext>
+            </a:extLst>
+          </p:cNvPr>
+          <p:cNvSpPr/>
+          <p:nvPr/>
+        </p:nvSpPr>
+        <p:spPr>
+          <a:xfrm>
+            <a:off x="-16886" y="493985"/>
+            <a:ext cx="3353985" cy="316961"/>
+          </a:xfrm>
+          <a:prstGeom prst="rect">
+            <a:avLst/>
+          </a:prstGeom>
+          <a:noFill/>
+          <a:ln>
+            <a:noFill/>
+          </a:ln>
+        </p:spPr>
+        <p:style>
+          <a:lnRef idx="2">
+            <a:schemeClr val="accent6"/>
+          </a:lnRef>
+          <a:fillRef idx="1">
+            <a:schemeClr val="lt1"/>
+          </a:fillRef>
+          <a:effectRef idx="0">
+            <a:schemeClr val="accent6"/>
+          </a:effectRef>
+          <a:fontRef idx="minor">
+            <a:schemeClr val="dk1"/>
+          </a:fontRef>
+        </p:style>
+        <p:txBody>
+          <a:bodyPr rtlCol="0" anchor="ctr"/>
+          <a:lstStyle/>
+          <a:p>
+            <a:pPr algn="ctr"/>
+            <a:r>
+              <a:rPr lang="en-MY" sz="1400" dirty="0"/>
+              <a:t>CREATE ON (18.03.2026)</a:t>
+            </a:r>
+          </a:p>
+        </p:txBody>
+      </p:sp>
+      <p:sp>
+        <p:nvSpPr>
+          <p:cNvPr id="3" name="Rectangle 2">
+            <a:extLst>
+              <a:ext uri="{FF2B5EF4-FFF2-40B4-BE49-F238E27FC236}">
+                <a16:creationId xmlns:a16="http://schemas.microsoft.com/office/drawing/2014/main" id="{DB4ADA14-556C-C309-8718-D47DA0A7B155}"/>
+              </a:ext>
+            </a:extLst>
+          </p:cNvPr>
+          <p:cNvSpPr/>
+          <p:nvPr/>
+        </p:nvSpPr>
+        <p:spPr>
+          <a:xfrm>
+            <a:off x="1557482" y="4760255"/>
+            <a:ext cx="1610264" cy="482595"/>
+          </a:xfrm>
+          <a:prstGeom prst="rect">
+            <a:avLst/>
+          </a:prstGeom>
+        </p:spPr>
+        <p:style>
+          <a:lnRef idx="2">
+            <a:schemeClr val="accent6"/>
+          </a:lnRef>
+          <a:fillRef idx="1">
+            <a:schemeClr val="lt1"/>
+          </a:fillRef>
+          <a:effectRef idx="0">
+            <a:schemeClr val="accent6"/>
+          </a:effectRef>
+          <a:fontRef idx="minor">
+            <a:schemeClr val="dk1"/>
+          </a:fontRef>
+        </p:style>
+        <p:txBody>
+          <a:bodyPr rtlCol="0" anchor="ctr"/>
+          <a:lstStyle/>
+          <a:p>
+            <a:pPr algn="ctr"/>
+            <a:r>
+              <a:rPr lang="en-MY" sz="1400" b="1" dirty="0"/>
+              <a:t>UNKNOWN</a:t>
+            </a:r>
+          </a:p>
+          <a:p>
+            <a:pPr algn="ctr"/>
+            <a:r>
+              <a:rPr lang="en-MY" sz="1400" dirty="0"/>
+              <a:t>= Assign by User</a:t>
+            </a:r>
+            <a:endParaRPr lang="en-MY" sz="1600" dirty="0"/>
+          </a:p>
+        </p:txBody>
+      </p:sp>
+      <p:sp>
+        <p:nvSpPr>
+          <p:cNvPr id="15" name="Rectangle 14">
+            <a:extLst>
+              <a:ext uri="{FF2B5EF4-FFF2-40B4-BE49-F238E27FC236}">
+                <a16:creationId xmlns:a16="http://schemas.microsoft.com/office/drawing/2014/main" id="{C961EBCC-E49B-C93D-F2D2-210F5633FD72}"/>
+              </a:ext>
+            </a:extLst>
+          </p:cNvPr>
+          <p:cNvSpPr/>
+          <p:nvPr/>
+        </p:nvSpPr>
+        <p:spPr>
+          <a:xfrm>
+            <a:off x="294568" y="1463374"/>
+            <a:ext cx="1419280" cy="635062"/>
+          </a:xfrm>
+          <a:prstGeom prst="rect">
+            <a:avLst/>
+          </a:prstGeom>
+        </p:spPr>
+        <p:style>
+          <a:lnRef idx="2">
+            <a:schemeClr val="accent6"/>
+          </a:lnRef>
+          <a:fillRef idx="1">
+            <a:schemeClr val="lt1"/>
+          </a:fillRef>
+          <a:effectRef idx="0">
+            <a:schemeClr val="accent6"/>
+          </a:effectRef>
+          <a:fontRef idx="minor">
+            <a:schemeClr val="dk1"/>
+          </a:fontRef>
+        </p:style>
+        <p:txBody>
+          <a:bodyPr rtlCol="0" anchor="ctr"/>
+          <a:lstStyle/>
+          <a:p>
+            <a:pPr algn="ctr"/>
+            <a:r>
+              <a:rPr lang="en-MY" dirty="0"/>
+              <a:t>NEW LIST EQUIPMENT</a:t>
+            </a:r>
+          </a:p>
+        </p:txBody>
+      </p:sp>
+      <p:sp>
+        <p:nvSpPr>
+          <p:cNvPr id="5" name="Rectangle 4">
+            <a:extLst>
+              <a:ext uri="{FF2B5EF4-FFF2-40B4-BE49-F238E27FC236}">
+                <a16:creationId xmlns:a16="http://schemas.microsoft.com/office/drawing/2014/main" id="{1B68DD4B-6101-9B54-2013-B930C6F32152}"/>
+              </a:ext>
+            </a:extLst>
+          </p:cNvPr>
+          <p:cNvSpPr/>
+          <p:nvPr/>
+        </p:nvSpPr>
+        <p:spPr>
+          <a:xfrm>
+            <a:off x="9950620" y="1463374"/>
+            <a:ext cx="1734622" cy="643241"/>
+          </a:xfrm>
+          <a:prstGeom prst="rect">
+            <a:avLst/>
+          </a:prstGeom>
+        </p:spPr>
+        <p:style>
+          <a:lnRef idx="2">
+            <a:schemeClr val="accent6"/>
+          </a:lnRef>
+          <a:fillRef idx="1">
+            <a:schemeClr val="lt1"/>
+          </a:fillRef>
+          <a:effectRef idx="0">
+            <a:schemeClr val="accent6"/>
+          </a:effectRef>
+          <a:fontRef idx="minor">
+            <a:schemeClr val="dk1"/>
+          </a:fontRef>
+        </p:style>
+        <p:txBody>
+          <a:bodyPr rtlCol="0" anchor="ctr"/>
+          <a:lstStyle/>
+          <a:p>
+            <a:pPr algn="ctr"/>
+            <a:r>
+              <a:rPr lang="en-US" dirty="0"/>
+              <a:t>UPDATE &amp; SAVE MODEL</a:t>
+            </a:r>
+            <a:endParaRPr lang="en-MY" dirty="0"/>
+          </a:p>
+        </p:txBody>
+      </p:sp>
+      <p:sp>
+        <p:nvSpPr>
+          <p:cNvPr id="28" name="Rectangle 27">
+            <a:extLst>
+              <a:ext uri="{FF2B5EF4-FFF2-40B4-BE49-F238E27FC236}">
+                <a16:creationId xmlns:a16="http://schemas.microsoft.com/office/drawing/2014/main" id="{8E3A1BAA-8A37-06A4-CFA7-3DA154A8EA4B}"/>
+              </a:ext>
+            </a:extLst>
+          </p:cNvPr>
+          <p:cNvSpPr/>
+          <p:nvPr/>
+        </p:nvSpPr>
+        <p:spPr>
+          <a:xfrm>
+            <a:off x="6935647" y="2487111"/>
+            <a:ext cx="1095037" cy="236026"/>
+          </a:xfrm>
+          <a:prstGeom prst="rect">
+            <a:avLst/>
+          </a:prstGeom>
+        </p:spPr>
+        <p:style>
+          <a:lnRef idx="2">
+            <a:schemeClr val="accent6"/>
+          </a:lnRef>
+          <a:fillRef idx="1">
+            <a:schemeClr val="lt1"/>
+          </a:fillRef>
+          <a:effectRef idx="0">
+            <a:schemeClr val="accent6"/>
+          </a:effectRef>
+          <a:fontRef idx="minor">
+            <a:schemeClr val="dk1"/>
+          </a:fontRef>
+        </p:style>
+        <p:txBody>
+          <a:bodyPr rtlCol="0" anchor="ctr"/>
+          <a:lstStyle/>
+          <a:p>
+            <a:pPr algn="ctr"/>
+            <a:r>
+              <a:rPr lang="en-US" dirty="0"/>
+              <a:t>S</a:t>
+            </a:r>
+            <a:r>
+              <a:rPr lang="en-MY" dirty="0"/>
+              <a:t>UFFIX</a:t>
+            </a:r>
+          </a:p>
+        </p:txBody>
+      </p:sp>
+      <p:sp>
+        <p:nvSpPr>
+          <p:cNvPr id="29" name="Rectangle 28">
+            <a:extLst>
+              <a:ext uri="{FF2B5EF4-FFF2-40B4-BE49-F238E27FC236}">
+                <a16:creationId xmlns:a16="http://schemas.microsoft.com/office/drawing/2014/main" id="{CA009BAE-D44D-F5B4-9F55-A99E839A952E}"/>
+              </a:ext>
+            </a:extLst>
+          </p:cNvPr>
+          <p:cNvSpPr/>
+          <p:nvPr/>
+        </p:nvSpPr>
+        <p:spPr>
+          <a:xfrm>
+            <a:off x="3490801" y="3928843"/>
+            <a:ext cx="1383224" cy="293620"/>
+          </a:xfrm>
+          <a:prstGeom prst="rect">
+            <a:avLst/>
+          </a:prstGeom>
+        </p:spPr>
+        <p:style>
+          <a:lnRef idx="2">
+            <a:schemeClr val="accent6"/>
+          </a:lnRef>
+          <a:fillRef idx="1">
+            <a:schemeClr val="lt1"/>
+          </a:fillRef>
+          <a:effectRef idx="0">
+            <a:schemeClr val="accent6"/>
+          </a:effectRef>
+          <a:fontRef idx="minor">
+            <a:schemeClr val="dk1"/>
+          </a:fontRef>
+        </p:style>
+        <p:txBody>
+          <a:bodyPr rtlCol="0" anchor="ctr"/>
+          <a:lstStyle/>
+          <a:p>
+            <a:pPr algn="ctr"/>
+            <a:r>
+              <a:rPr lang="en-US" sz="1600" dirty="0"/>
+              <a:t>Device Type</a:t>
+            </a:r>
+            <a:endParaRPr lang="en-MY" sz="1600" dirty="0"/>
+          </a:p>
+        </p:txBody>
+      </p:sp>
+      <p:sp>
+        <p:nvSpPr>
+          <p:cNvPr id="30" name="Rectangle 29">
+            <a:extLst>
+              <a:ext uri="{FF2B5EF4-FFF2-40B4-BE49-F238E27FC236}">
+                <a16:creationId xmlns:a16="http://schemas.microsoft.com/office/drawing/2014/main" id="{3690989D-EB23-A7D3-7439-DABFD06D0794}"/>
+              </a:ext>
+            </a:extLst>
+          </p:cNvPr>
+          <p:cNvSpPr/>
+          <p:nvPr/>
+        </p:nvSpPr>
+        <p:spPr>
+          <a:xfrm>
+            <a:off x="5865017" y="4014458"/>
+            <a:ext cx="920400" cy="237596"/>
+          </a:xfrm>
+          <a:prstGeom prst="rect">
+            <a:avLst/>
+          </a:prstGeom>
+        </p:spPr>
+        <p:style>
+          <a:lnRef idx="2">
+            <a:schemeClr val="accent6"/>
+          </a:lnRef>
+          <a:fillRef idx="1">
+            <a:schemeClr val="lt1"/>
+          </a:fillRef>
+          <a:effectRef idx="0">
+            <a:schemeClr val="accent6"/>
+          </a:effectRef>
+          <a:fontRef idx="minor">
+            <a:schemeClr val="dk1"/>
+          </a:fontRef>
+        </p:style>
+        <p:txBody>
+          <a:bodyPr rtlCol="0" anchor="ctr"/>
+          <a:lstStyle/>
+          <a:p>
+            <a:pPr algn="ctr"/>
+            <a:r>
+              <a:rPr lang="en-US" sz="1600" dirty="0"/>
+              <a:t>Section</a:t>
+            </a:r>
+            <a:endParaRPr lang="en-MY" dirty="0"/>
+          </a:p>
+        </p:txBody>
+      </p:sp>
+      <p:sp>
+        <p:nvSpPr>
+          <p:cNvPr id="31" name="Rectangle 30">
+            <a:extLst>
+              <a:ext uri="{FF2B5EF4-FFF2-40B4-BE49-F238E27FC236}">
+                <a16:creationId xmlns:a16="http://schemas.microsoft.com/office/drawing/2014/main" id="{E79F5D1E-CD6A-7D48-EB4E-8860169D6207}"/>
+              </a:ext>
+            </a:extLst>
+          </p:cNvPr>
+          <p:cNvSpPr/>
+          <p:nvPr/>
+        </p:nvSpPr>
+        <p:spPr>
+          <a:xfrm>
+            <a:off x="2428252" y="3053537"/>
+            <a:ext cx="2991706" cy="686520"/>
+          </a:xfrm>
+          <a:prstGeom prst="rect">
+            <a:avLst/>
+          </a:prstGeom>
+        </p:spPr>
+        <p:style>
+          <a:lnRef idx="2">
+            <a:schemeClr val="accent6"/>
+          </a:lnRef>
+          <a:fillRef idx="1">
+            <a:schemeClr val="lt1"/>
+          </a:fillRef>
+          <a:effectRef idx="0">
+            <a:schemeClr val="accent6"/>
+          </a:effectRef>
+          <a:fontRef idx="minor">
+            <a:schemeClr val="dk1"/>
+          </a:fontRef>
+        </p:style>
+        <p:txBody>
+          <a:bodyPr rtlCol="0" anchor="ctr"/>
+          <a:lstStyle/>
+          <a:p>
+            <a:pPr algn="ctr"/>
+            <a:r>
+              <a:rPr lang="en-US" b="1" dirty="0"/>
+              <a:t>SGD Classifier Hybrid Model </a:t>
+            </a:r>
+          </a:p>
+          <a:p>
+            <a:pPr algn="ctr"/>
+            <a:r>
+              <a:rPr lang="en-US" sz="1100" dirty="0"/>
+              <a:t>- SGD Classifier </a:t>
+            </a:r>
+          </a:p>
+          <a:p>
+            <a:pPr algn="ctr"/>
+            <a:r>
+              <a:rPr lang="en-US" sz="1100" dirty="0"/>
+              <a:t>- Composite Similarity</a:t>
+            </a:r>
+            <a:endParaRPr lang="en-MY" sz="1100" dirty="0"/>
+          </a:p>
+        </p:txBody>
+      </p:sp>
+      <p:sp>
+        <p:nvSpPr>
+          <p:cNvPr id="32" name="Rectangle 31">
+            <a:extLst>
+              <a:ext uri="{FF2B5EF4-FFF2-40B4-BE49-F238E27FC236}">
+                <a16:creationId xmlns:a16="http://schemas.microsoft.com/office/drawing/2014/main" id="{14D3ED68-A5CA-A2A1-EC69-C01276A330DC}"/>
+              </a:ext>
+            </a:extLst>
+          </p:cNvPr>
+          <p:cNvSpPr/>
+          <p:nvPr/>
+        </p:nvSpPr>
+        <p:spPr>
+          <a:xfrm>
+            <a:off x="5726456" y="3011355"/>
+            <a:ext cx="1197522" cy="267977"/>
+          </a:xfrm>
+          <a:prstGeom prst="rect">
+            <a:avLst/>
+          </a:prstGeom>
+        </p:spPr>
+        <p:style>
+          <a:lnRef idx="2">
+            <a:schemeClr val="accent6"/>
+          </a:lnRef>
+          <a:fillRef idx="1">
+            <a:schemeClr val="lt1"/>
+          </a:fillRef>
+          <a:effectRef idx="0">
+            <a:schemeClr val="accent6"/>
+          </a:effectRef>
+          <a:fontRef idx="minor">
+            <a:schemeClr val="dk1"/>
+          </a:fontRef>
+        </p:style>
+        <p:txBody>
+          <a:bodyPr rtlCol="0" anchor="ctr"/>
+          <a:lstStyle/>
+          <a:p>
+            <a:pPr algn="ctr"/>
+            <a:r>
+              <a:rPr lang="en-US" b="1" dirty="0" err="1"/>
+              <a:t>XGBoost</a:t>
+            </a:r>
+            <a:endParaRPr lang="en-MY" sz="1400" dirty="0"/>
+          </a:p>
+        </p:txBody>
+      </p:sp>
+      <p:sp>
+        <p:nvSpPr>
+          <p:cNvPr id="33" name="Rectangle 32">
+            <a:extLst>
+              <a:ext uri="{FF2B5EF4-FFF2-40B4-BE49-F238E27FC236}">
+                <a16:creationId xmlns:a16="http://schemas.microsoft.com/office/drawing/2014/main" id="{C45C02FA-690D-C3CB-2191-C15372D0FC28}"/>
+              </a:ext>
+            </a:extLst>
+          </p:cNvPr>
+          <p:cNvSpPr/>
+          <p:nvPr/>
+        </p:nvSpPr>
+        <p:spPr>
+          <a:xfrm>
+            <a:off x="2316480" y="1909006"/>
+            <a:ext cx="7195820" cy="2576751"/>
+          </a:xfrm>
+          <a:prstGeom prst="rect">
+            <a:avLst/>
+          </a:prstGeom>
+          <a:noFill/>
+          <a:ln w="76200">
+            <a:solidFill>
+              <a:schemeClr val="accent1"/>
+            </a:solidFill>
+          </a:ln>
+        </p:spPr>
+        <p:style>
+          <a:lnRef idx="2">
+            <a:schemeClr val="accent6"/>
+          </a:lnRef>
+          <a:fillRef idx="1">
+            <a:schemeClr val="lt1"/>
+          </a:fillRef>
+          <a:effectRef idx="0">
+            <a:schemeClr val="accent6"/>
+          </a:effectRef>
+          <a:fontRef idx="minor">
+            <a:schemeClr val="dk1"/>
+          </a:fontRef>
+        </p:style>
+        <p:txBody>
+          <a:bodyPr rtlCol="0" anchor="ctr"/>
+          <a:lstStyle/>
+          <a:p>
+            <a:pPr algn="ctr"/>
+            <a:endParaRPr lang="en-MY" b="1" dirty="0"/>
+          </a:p>
+        </p:txBody>
+      </p:sp>
+      <p:cxnSp>
+        <p:nvCxnSpPr>
+          <p:cNvPr id="34" name="Straight Arrow Connector 33">
+            <a:extLst>
+              <a:ext uri="{FF2B5EF4-FFF2-40B4-BE49-F238E27FC236}">
+                <a16:creationId xmlns:a16="http://schemas.microsoft.com/office/drawing/2014/main" id="{50B1280C-E353-29EA-5158-E1ACE8A858C7}"/>
+              </a:ext>
+            </a:extLst>
+          </p:cNvPr>
+          <p:cNvCxnSpPr>
+            <a:cxnSpLocks/>
+            <a:stCxn id="48" idx="2"/>
+            <a:endCxn id="12" idx="0"/>
+          </p:cNvCxnSpPr>
+          <p:nvPr/>
+        </p:nvCxnSpPr>
+        <p:spPr>
+          <a:xfrm flipH="1">
+            <a:off x="4114327" y="2019592"/>
+            <a:ext cx="1995049" cy="418760"/>
+          </a:xfrm>
+          <a:prstGeom prst="straightConnector1">
+            <a:avLst/>
+          </a:prstGeom>
+          <a:ln>
+            <a:solidFill>
+              <a:schemeClr val="tx2"/>
+            </a:solidFill>
+            <a:tailEnd type="triangle"/>
+          </a:ln>
+        </p:spPr>
+        <p:style>
+          <a:lnRef idx="1">
+            <a:schemeClr val="accent1"/>
+          </a:lnRef>
+          <a:fillRef idx="0">
+            <a:schemeClr val="accent1"/>
+          </a:fillRef>
+          <a:effectRef idx="0">
+            <a:schemeClr val="accent1"/>
+          </a:effectRef>
+          <a:fontRef idx="minor">
+            <a:schemeClr val="tx1"/>
+          </a:fontRef>
+        </p:style>
+      </p:cxnSp>
+      <p:cxnSp>
+        <p:nvCxnSpPr>
+          <p:cNvPr id="37" name="Straight Arrow Connector 36">
+            <a:extLst>
+              <a:ext uri="{FF2B5EF4-FFF2-40B4-BE49-F238E27FC236}">
+                <a16:creationId xmlns:a16="http://schemas.microsoft.com/office/drawing/2014/main" id="{ED366D70-1510-CF42-1823-4E988A8D80C1}"/>
+              </a:ext>
+            </a:extLst>
+          </p:cNvPr>
+          <p:cNvCxnSpPr>
+            <a:cxnSpLocks/>
+            <a:stCxn id="48" idx="2"/>
+            <a:endCxn id="28" idx="0"/>
+          </p:cNvCxnSpPr>
+          <p:nvPr/>
+        </p:nvCxnSpPr>
+        <p:spPr>
+          <a:xfrm>
+            <a:off x="6109376" y="2019592"/>
+            <a:ext cx="1373790" cy="467519"/>
+          </a:xfrm>
+          <a:prstGeom prst="straightConnector1">
+            <a:avLst/>
+          </a:prstGeom>
+          <a:ln>
+            <a:solidFill>
+              <a:schemeClr val="tx2"/>
+            </a:solidFill>
+            <a:tailEnd type="triangle"/>
+          </a:ln>
+        </p:spPr>
+        <p:style>
+          <a:lnRef idx="1">
+            <a:schemeClr val="accent1"/>
+          </a:lnRef>
+          <a:fillRef idx="0">
+            <a:schemeClr val="accent1"/>
+          </a:fillRef>
+          <a:effectRef idx="0">
+            <a:schemeClr val="accent1"/>
+          </a:effectRef>
+          <a:fontRef idx="minor">
+            <a:schemeClr val="tx1"/>
+          </a:fontRef>
+        </p:style>
+      </p:cxnSp>
+      <p:cxnSp>
+        <p:nvCxnSpPr>
+          <p:cNvPr id="40" name="Straight Arrow Connector 39">
+            <a:extLst>
+              <a:ext uri="{FF2B5EF4-FFF2-40B4-BE49-F238E27FC236}">
+                <a16:creationId xmlns:a16="http://schemas.microsoft.com/office/drawing/2014/main" id="{228F39D8-A364-A491-5B2C-429E1032BE64}"/>
+              </a:ext>
+            </a:extLst>
+          </p:cNvPr>
+          <p:cNvCxnSpPr>
+            <a:cxnSpLocks/>
+          </p:cNvCxnSpPr>
+          <p:nvPr/>
+        </p:nvCxnSpPr>
+        <p:spPr>
+          <a:xfrm>
+            <a:off x="4126392" y="2685576"/>
+            <a:ext cx="0" cy="367961"/>
+          </a:xfrm>
+          <a:prstGeom prst="straightConnector1">
+            <a:avLst/>
+          </a:prstGeom>
+          <a:ln>
+            <a:solidFill>
+              <a:schemeClr val="tx2"/>
+            </a:solidFill>
+            <a:tailEnd type="triangle"/>
+          </a:ln>
+        </p:spPr>
+        <p:style>
+          <a:lnRef idx="1">
+            <a:schemeClr val="accent1"/>
+          </a:lnRef>
+          <a:fillRef idx="0">
+            <a:schemeClr val="accent1"/>
+          </a:fillRef>
+          <a:effectRef idx="0">
+            <a:schemeClr val="accent1"/>
+          </a:effectRef>
+          <a:fontRef idx="minor">
+            <a:schemeClr val="tx1"/>
+          </a:fontRef>
+        </p:style>
+      </p:cxnSp>
+      <p:cxnSp>
+        <p:nvCxnSpPr>
+          <p:cNvPr id="43" name="Straight Arrow Connector 42">
+            <a:extLst>
+              <a:ext uri="{FF2B5EF4-FFF2-40B4-BE49-F238E27FC236}">
+                <a16:creationId xmlns:a16="http://schemas.microsoft.com/office/drawing/2014/main" id="{B6FEF42E-4656-8981-D383-06817A37F08A}"/>
+              </a:ext>
+            </a:extLst>
+          </p:cNvPr>
+          <p:cNvCxnSpPr>
+            <a:cxnSpLocks/>
+          </p:cNvCxnSpPr>
+          <p:nvPr/>
+        </p:nvCxnSpPr>
+        <p:spPr>
+          <a:xfrm>
+            <a:off x="4156249" y="3740057"/>
+            <a:ext cx="0" cy="177716"/>
+          </a:xfrm>
+          <a:prstGeom prst="straightConnector1">
+            <a:avLst/>
+          </a:prstGeom>
+          <a:ln>
+            <a:solidFill>
+              <a:schemeClr val="tx2"/>
+            </a:solidFill>
+            <a:tailEnd type="triangle"/>
+          </a:ln>
+        </p:spPr>
+        <p:style>
+          <a:lnRef idx="1">
+            <a:schemeClr val="accent1"/>
+          </a:lnRef>
+          <a:fillRef idx="0">
+            <a:schemeClr val="accent1"/>
+          </a:fillRef>
+          <a:effectRef idx="0">
+            <a:schemeClr val="accent1"/>
+          </a:effectRef>
+          <a:fontRef idx="minor">
+            <a:schemeClr val="tx1"/>
+          </a:fontRef>
+        </p:style>
+      </p:cxnSp>
+      <p:cxnSp>
+        <p:nvCxnSpPr>
+          <p:cNvPr id="46" name="Straight Arrow Connector 45">
+            <a:extLst>
+              <a:ext uri="{FF2B5EF4-FFF2-40B4-BE49-F238E27FC236}">
+                <a16:creationId xmlns:a16="http://schemas.microsoft.com/office/drawing/2014/main" id="{C9FC763D-AB16-C05E-FCAC-17C951C51634}"/>
+              </a:ext>
+            </a:extLst>
+          </p:cNvPr>
+          <p:cNvCxnSpPr>
+            <a:cxnSpLocks/>
+            <a:stCxn id="28" idx="2"/>
+          </p:cNvCxnSpPr>
+          <p:nvPr/>
+        </p:nvCxnSpPr>
+        <p:spPr>
+          <a:xfrm flipH="1">
+            <a:off x="6334911" y="2723137"/>
+            <a:ext cx="1148255" cy="287437"/>
+          </a:xfrm>
+          <a:prstGeom prst="straightConnector1">
+            <a:avLst/>
+          </a:prstGeom>
+          <a:ln>
+            <a:solidFill>
+              <a:schemeClr val="tx2"/>
+            </a:solidFill>
+            <a:tailEnd type="triangle"/>
+          </a:ln>
+        </p:spPr>
+        <p:style>
+          <a:lnRef idx="1">
+            <a:schemeClr val="accent1"/>
+          </a:lnRef>
+          <a:fillRef idx="0">
+            <a:schemeClr val="accent1"/>
+          </a:fillRef>
+          <a:effectRef idx="0">
+            <a:schemeClr val="accent1"/>
+          </a:effectRef>
+          <a:fontRef idx="minor">
+            <a:schemeClr val="tx1"/>
+          </a:fontRef>
+        </p:style>
+      </p:cxnSp>
+      <p:cxnSp>
+        <p:nvCxnSpPr>
+          <p:cNvPr id="50" name="Straight Arrow Connector 49">
+            <a:extLst>
+              <a:ext uri="{FF2B5EF4-FFF2-40B4-BE49-F238E27FC236}">
+                <a16:creationId xmlns:a16="http://schemas.microsoft.com/office/drawing/2014/main" id="{76460963-CA31-955B-1356-B12770A46D12}"/>
+              </a:ext>
+            </a:extLst>
+          </p:cNvPr>
+          <p:cNvCxnSpPr>
+            <a:cxnSpLocks/>
+            <a:stCxn id="32" idx="2"/>
+            <a:endCxn id="30" idx="0"/>
+          </p:cNvCxnSpPr>
+          <p:nvPr/>
+        </p:nvCxnSpPr>
+        <p:spPr>
+          <a:xfrm>
+            <a:off x="6325217" y="3279332"/>
+            <a:ext cx="0" cy="735126"/>
+          </a:xfrm>
+          <a:prstGeom prst="straightConnector1">
+            <a:avLst/>
+          </a:prstGeom>
+          <a:ln>
+            <a:solidFill>
+              <a:schemeClr val="tx2"/>
+            </a:solidFill>
+            <a:tailEnd type="triangle"/>
+          </a:ln>
+        </p:spPr>
+        <p:style>
+          <a:lnRef idx="1">
+            <a:schemeClr val="accent1"/>
+          </a:lnRef>
+          <a:fillRef idx="0">
+            <a:schemeClr val="accent1"/>
+          </a:fillRef>
+          <a:effectRef idx="0">
+            <a:schemeClr val="accent1"/>
+          </a:effectRef>
+          <a:fontRef idx="minor">
+            <a:schemeClr val="tx1"/>
+          </a:fontRef>
+        </p:style>
+      </p:cxnSp>
+      <p:cxnSp>
+        <p:nvCxnSpPr>
+          <p:cNvPr id="86" name="Straight Arrow Connector 85">
+            <a:extLst>
+              <a:ext uri="{FF2B5EF4-FFF2-40B4-BE49-F238E27FC236}">
+                <a16:creationId xmlns:a16="http://schemas.microsoft.com/office/drawing/2014/main" id="{62DE82C8-536C-FB4F-0DF1-B2B400ED795F}"/>
+              </a:ext>
+            </a:extLst>
+          </p:cNvPr>
+          <p:cNvCxnSpPr>
+            <a:cxnSpLocks/>
+            <a:stCxn id="15" idx="3"/>
+            <a:endCxn id="48" idx="1"/>
+          </p:cNvCxnSpPr>
+          <p:nvPr/>
+        </p:nvCxnSpPr>
+        <p:spPr>
+          <a:xfrm>
+            <a:off x="1713848" y="1780905"/>
+            <a:ext cx="3719486" cy="8569"/>
+          </a:xfrm>
+          <a:prstGeom prst="straightConnector1">
+            <a:avLst/>
+          </a:prstGeom>
+          <a:ln w="76200">
+            <a:solidFill>
+              <a:schemeClr val="tx1"/>
+            </a:solidFill>
+            <a:tailEnd type="triangle"/>
+          </a:ln>
+        </p:spPr>
+        <p:style>
+          <a:lnRef idx="1">
+            <a:schemeClr val="accent1"/>
+          </a:lnRef>
+          <a:fillRef idx="0">
+            <a:schemeClr val="accent1"/>
+          </a:fillRef>
+          <a:effectRef idx="0">
+            <a:schemeClr val="accent1"/>
+          </a:effectRef>
+          <a:fontRef idx="minor">
+            <a:schemeClr val="tx1"/>
+          </a:fontRef>
+        </p:style>
+      </p:cxnSp>
+      <p:cxnSp>
+        <p:nvCxnSpPr>
+          <p:cNvPr id="90" name="Straight Arrow Connector 89">
+            <a:extLst>
+              <a:ext uri="{FF2B5EF4-FFF2-40B4-BE49-F238E27FC236}">
+                <a16:creationId xmlns:a16="http://schemas.microsoft.com/office/drawing/2014/main" id="{19ABED89-3B8F-B118-E340-A5A5A1816223}"/>
+              </a:ext>
+            </a:extLst>
+          </p:cNvPr>
+          <p:cNvCxnSpPr>
+            <a:cxnSpLocks/>
+            <a:stCxn id="48" idx="3"/>
+            <a:endCxn id="5" idx="1"/>
+          </p:cNvCxnSpPr>
+          <p:nvPr/>
+        </p:nvCxnSpPr>
+        <p:spPr>
+          <a:xfrm flipV="1">
+            <a:off x="6785417" y="1784995"/>
+            <a:ext cx="3165203" cy="4479"/>
+          </a:xfrm>
+          <a:prstGeom prst="straightConnector1">
+            <a:avLst/>
+          </a:prstGeom>
+          <a:ln w="76200">
+            <a:solidFill>
+              <a:schemeClr val="tx1"/>
+            </a:solidFill>
+            <a:tailEnd type="triangle"/>
+          </a:ln>
+        </p:spPr>
+        <p:style>
+          <a:lnRef idx="1">
+            <a:schemeClr val="accent1"/>
+          </a:lnRef>
+          <a:fillRef idx="0">
+            <a:schemeClr val="accent1"/>
+          </a:fillRef>
+          <a:effectRef idx="0">
+            <a:schemeClr val="accent1"/>
+          </a:effectRef>
+          <a:fontRef idx="minor">
+            <a:schemeClr val="tx1"/>
+          </a:fontRef>
+        </p:style>
+      </p:cxnSp>
+      <p:cxnSp>
+        <p:nvCxnSpPr>
+          <p:cNvPr id="20" name="Straight Arrow Connector 19">
+            <a:extLst>
+              <a:ext uri="{FF2B5EF4-FFF2-40B4-BE49-F238E27FC236}">
+                <a16:creationId xmlns:a16="http://schemas.microsoft.com/office/drawing/2014/main" id="{B6F19441-888D-F983-EB9B-43F03913D145}"/>
+              </a:ext>
+            </a:extLst>
+          </p:cNvPr>
+          <p:cNvCxnSpPr>
+            <a:cxnSpLocks/>
+            <a:stCxn id="4" idx="2"/>
+            <a:endCxn id="48" idx="0"/>
+          </p:cNvCxnSpPr>
+          <p:nvPr/>
+        </p:nvCxnSpPr>
+        <p:spPr>
+          <a:xfrm>
+            <a:off x="6096001" y="740321"/>
+            <a:ext cx="13375" cy="819034"/>
+          </a:xfrm>
+          <a:prstGeom prst="straightConnector1">
+            <a:avLst/>
+          </a:prstGeom>
+          <a:ln w="57150">
+            <a:solidFill>
+              <a:schemeClr val="tx1"/>
+            </a:solidFill>
+            <a:tailEnd type="triangle"/>
+          </a:ln>
+        </p:spPr>
+        <p:style>
+          <a:lnRef idx="1">
+            <a:schemeClr val="accent1"/>
+          </a:lnRef>
+          <a:fillRef idx="0">
+            <a:schemeClr val="accent1"/>
+          </a:fillRef>
+          <a:effectRef idx="0">
+            <a:schemeClr val="accent1"/>
+          </a:effectRef>
+          <a:fontRef idx="minor">
+            <a:schemeClr val="tx1"/>
+          </a:fontRef>
+        </p:style>
+      </p:cxnSp>
+      <p:sp>
+        <p:nvSpPr>
+          <p:cNvPr id="104" name="Rectangle 103">
+            <a:extLst>
+              <a:ext uri="{FF2B5EF4-FFF2-40B4-BE49-F238E27FC236}">
+                <a16:creationId xmlns:a16="http://schemas.microsoft.com/office/drawing/2014/main" id="{E50DA2D7-5321-C782-AAA8-70008D5D8EB0}"/>
+              </a:ext>
+            </a:extLst>
+          </p:cNvPr>
+          <p:cNvSpPr/>
+          <p:nvPr/>
+        </p:nvSpPr>
+        <p:spPr>
+          <a:xfrm>
+            <a:off x="8078855" y="2992364"/>
+            <a:ext cx="1049965" cy="267977"/>
+          </a:xfrm>
+          <a:prstGeom prst="rect">
+            <a:avLst/>
+          </a:prstGeom>
+        </p:spPr>
+        <p:style>
+          <a:lnRef idx="2">
+            <a:schemeClr val="accent6"/>
+          </a:lnRef>
+          <a:fillRef idx="1">
+            <a:schemeClr val="lt1"/>
+          </a:fillRef>
+          <a:effectRef idx="0">
+            <a:schemeClr val="accent6"/>
+          </a:effectRef>
+          <a:fontRef idx="minor">
+            <a:schemeClr val="dk1"/>
+          </a:fontRef>
+        </p:style>
+        <p:txBody>
+          <a:bodyPr rtlCol="0" anchor="ctr"/>
+          <a:lstStyle/>
+          <a:p>
+            <a:pPr algn="ctr"/>
+            <a:r>
+              <a:rPr lang="en-US" b="1" dirty="0" err="1"/>
+              <a:t>DBScan</a:t>
+            </a:r>
+            <a:endParaRPr lang="en-MY" sz="1400" dirty="0"/>
+          </a:p>
+        </p:txBody>
+      </p:sp>
+      <p:cxnSp>
+        <p:nvCxnSpPr>
+          <p:cNvPr id="107" name="Straight Arrow Connector 106">
+            <a:extLst>
+              <a:ext uri="{FF2B5EF4-FFF2-40B4-BE49-F238E27FC236}">
+                <a16:creationId xmlns:a16="http://schemas.microsoft.com/office/drawing/2014/main" id="{256C5957-EB4A-DF08-B3C1-09B043758ADD}"/>
+              </a:ext>
+            </a:extLst>
+          </p:cNvPr>
+          <p:cNvCxnSpPr>
+            <a:cxnSpLocks/>
+            <a:stCxn id="28" idx="2"/>
+            <a:endCxn id="104" idx="0"/>
+          </p:cNvCxnSpPr>
+          <p:nvPr/>
+        </p:nvCxnSpPr>
+        <p:spPr>
+          <a:xfrm>
+            <a:off x="7483166" y="2723137"/>
+            <a:ext cx="1120672" cy="269227"/>
+          </a:xfrm>
+          <a:prstGeom prst="straightConnector1">
+            <a:avLst/>
+          </a:prstGeom>
+          <a:ln>
+            <a:solidFill>
+              <a:schemeClr val="tx2"/>
+            </a:solidFill>
+            <a:tailEnd type="triangle"/>
+          </a:ln>
+        </p:spPr>
+        <p:style>
+          <a:lnRef idx="1">
+            <a:schemeClr val="accent1"/>
+          </a:lnRef>
+          <a:fillRef idx="0">
+            <a:schemeClr val="accent1"/>
+          </a:fillRef>
+          <a:effectRef idx="0">
+            <a:schemeClr val="accent1"/>
+          </a:effectRef>
+          <a:fontRef idx="minor">
+            <a:schemeClr val="tx1"/>
+          </a:fontRef>
+        </p:style>
+      </p:cxnSp>
+      <p:sp>
+        <p:nvSpPr>
+          <p:cNvPr id="113" name="Rectangle 112">
+            <a:extLst>
+              <a:ext uri="{FF2B5EF4-FFF2-40B4-BE49-F238E27FC236}">
+                <a16:creationId xmlns:a16="http://schemas.microsoft.com/office/drawing/2014/main" id="{1498A5A2-DD75-04DF-0A80-6D33023126E4}"/>
+              </a:ext>
+            </a:extLst>
+          </p:cNvPr>
+          <p:cNvSpPr/>
+          <p:nvPr/>
+        </p:nvSpPr>
+        <p:spPr>
+          <a:xfrm>
+            <a:off x="8143637" y="4014458"/>
+            <a:ext cx="920400" cy="237596"/>
+          </a:xfrm>
+          <a:prstGeom prst="rect">
+            <a:avLst/>
+          </a:prstGeom>
+        </p:spPr>
+        <p:style>
+          <a:lnRef idx="2">
+            <a:schemeClr val="accent6"/>
+          </a:lnRef>
+          <a:fillRef idx="1">
+            <a:schemeClr val="lt1"/>
+          </a:fillRef>
+          <a:effectRef idx="0">
+            <a:schemeClr val="accent6"/>
+          </a:effectRef>
+          <a:fontRef idx="minor">
+            <a:schemeClr val="dk1"/>
+          </a:fontRef>
+        </p:style>
+        <p:txBody>
+          <a:bodyPr rtlCol="0" anchor="ctr"/>
+          <a:lstStyle/>
+          <a:p>
+            <a:pPr algn="ctr"/>
+            <a:r>
+              <a:rPr lang="en-US" sz="1600" dirty="0"/>
+              <a:t>Cluster</a:t>
+            </a:r>
+            <a:endParaRPr lang="en-MY" dirty="0"/>
+          </a:p>
+        </p:txBody>
+      </p:sp>
+      <p:cxnSp>
+        <p:nvCxnSpPr>
+          <p:cNvPr id="114" name="Straight Arrow Connector 113">
+            <a:extLst>
+              <a:ext uri="{FF2B5EF4-FFF2-40B4-BE49-F238E27FC236}">
+                <a16:creationId xmlns:a16="http://schemas.microsoft.com/office/drawing/2014/main" id="{0900296C-AD16-20AA-03BB-D5F941E72D3A}"/>
+              </a:ext>
+            </a:extLst>
+          </p:cNvPr>
+          <p:cNvCxnSpPr>
+            <a:cxnSpLocks/>
+            <a:stCxn id="104" idx="2"/>
+            <a:endCxn id="113" idx="0"/>
+          </p:cNvCxnSpPr>
+          <p:nvPr/>
+        </p:nvCxnSpPr>
+        <p:spPr>
+          <a:xfrm flipH="1">
+            <a:off x="8603837" y="3260341"/>
+            <a:ext cx="1" cy="754117"/>
+          </a:xfrm>
+          <a:prstGeom prst="straightConnector1">
+            <a:avLst/>
+          </a:prstGeom>
+          <a:ln>
+            <a:solidFill>
+              <a:schemeClr val="tx2"/>
+            </a:solidFill>
+            <a:tailEnd type="triangle"/>
+          </a:ln>
+        </p:spPr>
+        <p:style>
+          <a:lnRef idx="1">
+            <a:schemeClr val="accent1"/>
+          </a:lnRef>
+          <a:fillRef idx="0">
+            <a:schemeClr val="accent1"/>
+          </a:fillRef>
+          <a:effectRef idx="0">
+            <a:schemeClr val="accent1"/>
+          </a:effectRef>
+          <a:fontRef idx="minor">
+            <a:schemeClr val="tx1"/>
+          </a:fontRef>
+        </p:style>
+      </p:cxnSp>
+      <p:cxnSp>
+        <p:nvCxnSpPr>
+          <p:cNvPr id="118" name="Straight Arrow Connector 117">
+            <a:extLst>
+              <a:ext uri="{FF2B5EF4-FFF2-40B4-BE49-F238E27FC236}">
+                <a16:creationId xmlns:a16="http://schemas.microsoft.com/office/drawing/2014/main" id="{F26D2039-7C65-8931-F540-0D055AB19AF1}"/>
+              </a:ext>
+            </a:extLst>
+          </p:cNvPr>
+          <p:cNvCxnSpPr>
+            <a:cxnSpLocks/>
+            <a:stCxn id="113" idx="2"/>
+            <a:endCxn id="11" idx="0"/>
+          </p:cNvCxnSpPr>
+          <p:nvPr/>
+        </p:nvCxnSpPr>
+        <p:spPr>
+          <a:xfrm flipH="1">
+            <a:off x="6334911" y="4252054"/>
+            <a:ext cx="2268926" cy="476229"/>
+          </a:xfrm>
+          <a:prstGeom prst="straightConnector1">
+            <a:avLst/>
+          </a:prstGeom>
+          <a:ln>
+            <a:solidFill>
+              <a:schemeClr val="tx2"/>
+            </a:solidFill>
+            <a:tailEnd type="triangle"/>
+          </a:ln>
+        </p:spPr>
+        <p:style>
+          <a:lnRef idx="1">
+            <a:schemeClr val="accent1"/>
+          </a:lnRef>
+          <a:fillRef idx="0">
+            <a:schemeClr val="accent1"/>
+          </a:fillRef>
+          <a:effectRef idx="0">
+            <a:schemeClr val="accent1"/>
+          </a:effectRef>
+          <a:fontRef idx="minor">
+            <a:schemeClr val="tx1"/>
+          </a:fontRef>
+        </p:style>
+      </p:cxnSp>
+      <p:cxnSp>
+        <p:nvCxnSpPr>
+          <p:cNvPr id="49" name="Straight Arrow Connector 48">
+            <a:extLst>
+              <a:ext uri="{FF2B5EF4-FFF2-40B4-BE49-F238E27FC236}">
+                <a16:creationId xmlns:a16="http://schemas.microsoft.com/office/drawing/2014/main" id="{B42A3614-9713-4F95-B94F-13D4FCEF8B52}"/>
+              </a:ext>
+            </a:extLst>
+          </p:cNvPr>
+          <p:cNvCxnSpPr>
+            <a:cxnSpLocks/>
+            <a:stCxn id="30" idx="2"/>
+            <a:endCxn id="11" idx="0"/>
+          </p:cNvCxnSpPr>
+          <p:nvPr/>
+        </p:nvCxnSpPr>
+        <p:spPr>
+          <a:xfrm>
+            <a:off x="6325217" y="4252054"/>
+            <a:ext cx="9694" cy="476229"/>
+          </a:xfrm>
+          <a:prstGeom prst="straightConnector1">
+            <a:avLst/>
+          </a:prstGeom>
+          <a:ln>
+            <a:solidFill>
+              <a:schemeClr val="tx2"/>
+            </a:solidFill>
+            <a:tailEnd type="triangle"/>
+          </a:ln>
+        </p:spPr>
+        <p:style>
+          <a:lnRef idx="1">
+            <a:schemeClr val="accent1"/>
+          </a:lnRef>
+          <a:fillRef idx="0">
+            <a:schemeClr val="accent1"/>
+          </a:fillRef>
+          <a:effectRef idx="0">
+            <a:schemeClr val="accent1"/>
+          </a:effectRef>
+          <a:fontRef idx="minor">
+            <a:schemeClr val="tx1"/>
+          </a:fontRef>
+        </p:style>
+      </p:cxnSp>
+      <p:cxnSp>
+        <p:nvCxnSpPr>
+          <p:cNvPr id="53" name="Straight Arrow Connector 52">
+            <a:extLst>
+              <a:ext uri="{FF2B5EF4-FFF2-40B4-BE49-F238E27FC236}">
+                <a16:creationId xmlns:a16="http://schemas.microsoft.com/office/drawing/2014/main" id="{EBFFE8D3-AC92-50AC-C6B5-A8171747AB17}"/>
+              </a:ext>
+            </a:extLst>
+          </p:cNvPr>
+          <p:cNvCxnSpPr>
+            <a:cxnSpLocks/>
+            <a:stCxn id="29" idx="2"/>
+            <a:endCxn id="11" idx="0"/>
+          </p:cNvCxnSpPr>
+          <p:nvPr/>
+        </p:nvCxnSpPr>
+        <p:spPr>
+          <a:xfrm>
+            <a:off x="4182413" y="4222463"/>
+            <a:ext cx="2152498" cy="505820"/>
+          </a:xfrm>
+          <a:prstGeom prst="straightConnector1">
+            <a:avLst/>
+          </a:prstGeom>
+          <a:ln>
+            <a:solidFill>
+              <a:schemeClr val="tx2"/>
+            </a:solidFill>
+            <a:tailEnd type="triangle"/>
+          </a:ln>
+        </p:spPr>
+        <p:style>
+          <a:lnRef idx="1">
+            <a:schemeClr val="accent1"/>
+          </a:lnRef>
+          <a:fillRef idx="0">
+            <a:schemeClr val="accent1"/>
+          </a:fillRef>
+          <a:effectRef idx="0">
+            <a:schemeClr val="accent1"/>
+          </a:effectRef>
+          <a:fontRef idx="minor">
+            <a:schemeClr val="tx1"/>
+          </a:fontRef>
+        </p:style>
+      </p:cxnSp>
+      <p:cxnSp>
+        <p:nvCxnSpPr>
+          <p:cNvPr id="68" name="Straight Arrow Connector 67">
+            <a:extLst>
+              <a:ext uri="{FF2B5EF4-FFF2-40B4-BE49-F238E27FC236}">
+                <a16:creationId xmlns:a16="http://schemas.microsoft.com/office/drawing/2014/main" id="{411AFC0C-CF7A-CDF2-EC1E-07215C078581}"/>
+              </a:ext>
+            </a:extLst>
+          </p:cNvPr>
+          <p:cNvCxnSpPr>
+            <a:cxnSpLocks/>
+            <a:stCxn id="11" idx="1"/>
+            <a:endCxn id="3" idx="3"/>
+          </p:cNvCxnSpPr>
+          <p:nvPr/>
+        </p:nvCxnSpPr>
+        <p:spPr>
+          <a:xfrm flipH="1" flipV="1">
+            <a:off x="3167746" y="5001553"/>
+            <a:ext cx="1573802" cy="25483"/>
+          </a:xfrm>
+          <a:prstGeom prst="straightConnector1">
+            <a:avLst/>
+          </a:prstGeom>
+          <a:ln w="57150">
+            <a:solidFill>
+              <a:schemeClr val="tx1"/>
+            </a:solidFill>
+            <a:tailEnd type="triangle"/>
+          </a:ln>
+        </p:spPr>
+        <p:style>
+          <a:lnRef idx="1">
+            <a:schemeClr val="accent1"/>
+          </a:lnRef>
+          <a:fillRef idx="0">
+            <a:schemeClr val="accent1"/>
+          </a:fillRef>
+          <a:effectRef idx="0">
+            <a:schemeClr val="accent1"/>
+          </a:effectRef>
+          <a:fontRef idx="minor">
+            <a:schemeClr val="tx1"/>
+          </a:fontRef>
+        </p:style>
+      </p:cxnSp>
+      <p:sp>
+        <p:nvSpPr>
+          <p:cNvPr id="78" name="Rectangle 77">
+            <a:extLst>
+              <a:ext uri="{FF2B5EF4-FFF2-40B4-BE49-F238E27FC236}">
+                <a16:creationId xmlns:a16="http://schemas.microsoft.com/office/drawing/2014/main" id="{82450F8A-D658-9FDB-7531-BCD001B299A6}"/>
+              </a:ext>
+            </a:extLst>
+          </p:cNvPr>
+          <p:cNvSpPr/>
+          <p:nvPr/>
+        </p:nvSpPr>
+        <p:spPr>
+          <a:xfrm>
+            <a:off x="5063967" y="5786026"/>
+            <a:ext cx="2541886" cy="288020"/>
+          </a:xfrm>
+          <a:prstGeom prst="rect">
+            <a:avLst/>
+          </a:prstGeom>
+        </p:spPr>
+        <p:style>
+          <a:lnRef idx="2">
+            <a:schemeClr val="accent6"/>
+          </a:lnRef>
+          <a:fillRef idx="1">
+            <a:schemeClr val="lt1"/>
+          </a:fillRef>
+          <a:effectRef idx="0">
+            <a:schemeClr val="accent6"/>
+          </a:effectRef>
+          <a:fontRef idx="minor">
+            <a:schemeClr val="dk1"/>
+          </a:fontRef>
+        </p:style>
+        <p:txBody>
+          <a:bodyPr rtlCol="0" anchor="ctr"/>
+          <a:lstStyle/>
+          <a:p>
+            <a:pPr algn="ctr"/>
+            <a:r>
+              <a:rPr lang="en-US" dirty="0"/>
+              <a:t>UPDATE &amp; SAVE MODEL</a:t>
+            </a:r>
+            <a:endParaRPr lang="en-MY" dirty="0"/>
+          </a:p>
+        </p:txBody>
+      </p:sp>
+      <p:cxnSp>
+        <p:nvCxnSpPr>
+          <p:cNvPr id="79" name="Straight Arrow Connector 78">
+            <a:extLst>
+              <a:ext uri="{FF2B5EF4-FFF2-40B4-BE49-F238E27FC236}">
+                <a16:creationId xmlns:a16="http://schemas.microsoft.com/office/drawing/2014/main" id="{47316FE7-4B6A-51D9-845B-5E9B0697049A}"/>
+              </a:ext>
+            </a:extLst>
+          </p:cNvPr>
+          <p:cNvCxnSpPr>
+            <a:cxnSpLocks/>
+            <a:stCxn id="11" idx="2"/>
+            <a:endCxn id="78" idx="0"/>
+          </p:cNvCxnSpPr>
+          <p:nvPr/>
+        </p:nvCxnSpPr>
+        <p:spPr>
+          <a:xfrm flipH="1">
+            <a:off x="6334910" y="5325789"/>
+            <a:ext cx="1" cy="460237"/>
+          </a:xfrm>
+          <a:prstGeom prst="straightConnector1">
+            <a:avLst/>
+          </a:prstGeom>
+          <a:ln w="57150">
+            <a:solidFill>
+              <a:schemeClr val="tx1"/>
+            </a:solidFill>
+            <a:tailEnd type="triangle"/>
+          </a:ln>
+        </p:spPr>
+        <p:style>
+          <a:lnRef idx="1">
+            <a:schemeClr val="accent1"/>
+          </a:lnRef>
+          <a:fillRef idx="0">
+            <a:schemeClr val="accent1"/>
+          </a:fillRef>
+          <a:effectRef idx="0">
+            <a:schemeClr val="accent1"/>
+          </a:effectRef>
+          <a:fontRef idx="minor">
+            <a:schemeClr val="tx1"/>
+          </a:fontRef>
+        </p:style>
+      </p:cxnSp>
+      <p:grpSp>
+        <p:nvGrpSpPr>
+          <p:cNvPr id="80" name="Group 79">
+            <a:extLst>
+              <a:ext uri="{FF2B5EF4-FFF2-40B4-BE49-F238E27FC236}">
+                <a16:creationId xmlns:a16="http://schemas.microsoft.com/office/drawing/2014/main" id="{A2EBA51A-B89B-4B76-F652-7D3A5839B008}"/>
+              </a:ext>
+            </a:extLst>
+          </p:cNvPr>
+          <p:cNvGrpSpPr/>
+          <p:nvPr/>
+        </p:nvGrpSpPr>
+        <p:grpSpPr>
+          <a:xfrm>
+            <a:off x="972920" y="2098436"/>
+            <a:ext cx="584562" cy="2928602"/>
+            <a:chOff x="972920" y="2098436"/>
+            <a:chExt cx="584562" cy="2928602"/>
+          </a:xfrm>
+        </p:grpSpPr>
+        <p:cxnSp>
+          <p:nvCxnSpPr>
+            <p:cNvPr id="87" name="Straight Arrow Connector 86">
+              <a:extLst>
+                <a:ext uri="{FF2B5EF4-FFF2-40B4-BE49-F238E27FC236}">
+                  <a16:creationId xmlns:a16="http://schemas.microsoft.com/office/drawing/2014/main" id="{C3DC5C35-9205-120B-F8B2-E5B5DF7F3564}"/>
+                </a:ext>
+              </a:extLst>
+            </p:cNvPr>
+            <p:cNvCxnSpPr>
+              <a:cxnSpLocks/>
+              <a:endCxn id="15" idx="2"/>
+            </p:cNvCxnSpPr>
+            <p:nvPr/>
+          </p:nvCxnSpPr>
+          <p:spPr>
+            <a:xfrm flipV="1">
+              <a:off x="998294" y="2098436"/>
+              <a:ext cx="5914" cy="2928602"/>
+            </a:xfrm>
+            <a:prstGeom prst="straightConnector1">
+              <a:avLst/>
+            </a:prstGeom>
+            <a:ln w="57150">
+              <a:solidFill>
+                <a:schemeClr val="tx1"/>
+              </a:solidFill>
+              <a:tailEnd type="triangle"/>
+            </a:ln>
+          </p:spPr>
+          <p:style>
+            <a:lnRef idx="1">
+              <a:schemeClr val="accent1"/>
+            </a:lnRef>
+            <a:fillRef idx="0">
+              <a:schemeClr val="accent1"/>
+            </a:fillRef>
+            <a:effectRef idx="0">
+              <a:schemeClr val="accent1"/>
+            </a:effectRef>
+            <a:fontRef idx="minor">
+              <a:schemeClr val="tx1"/>
+            </a:fontRef>
+          </p:style>
+        </p:cxnSp>
+        <p:cxnSp>
+          <p:nvCxnSpPr>
+            <p:cNvPr id="93" name="Straight Connector 92">
+              <a:extLst>
+                <a:ext uri="{FF2B5EF4-FFF2-40B4-BE49-F238E27FC236}">
+                  <a16:creationId xmlns:a16="http://schemas.microsoft.com/office/drawing/2014/main" id="{DA5A4D9E-2892-9ACD-3EA3-E817A29BC06F}"/>
+                </a:ext>
+              </a:extLst>
+            </p:cNvPr>
+            <p:cNvCxnSpPr>
+              <a:cxnSpLocks/>
+              <a:endCxn id="3" idx="1"/>
+            </p:cNvCxnSpPr>
+            <p:nvPr/>
+          </p:nvCxnSpPr>
+          <p:spPr>
+            <a:xfrm>
+              <a:off x="972920" y="5001552"/>
+              <a:ext cx="584562" cy="1"/>
+            </a:xfrm>
+            <a:prstGeom prst="line">
+              <a:avLst/>
+            </a:prstGeom>
+            <a:ln w="57150">
+              <a:solidFill>
+                <a:schemeClr val="tx1"/>
+              </a:solidFill>
+            </a:ln>
+          </p:spPr>
+          <p:style>
+            <a:lnRef idx="1">
+              <a:schemeClr val="dk1"/>
+            </a:lnRef>
+            <a:fillRef idx="0">
+              <a:schemeClr val="dk1"/>
+            </a:fillRef>
+            <a:effectRef idx="0">
+              <a:schemeClr val="dk1"/>
+            </a:effectRef>
+            <a:fontRef idx="minor">
+              <a:schemeClr val="tx1"/>
+            </a:fontRef>
+          </p:style>
+        </p:cxnSp>
+      </p:grpSp>
+      <p:sp>
+        <p:nvSpPr>
+          <p:cNvPr id="100" name="Rectangle 99">
+            <a:extLst>
+              <a:ext uri="{FF2B5EF4-FFF2-40B4-BE49-F238E27FC236}">
+                <a16:creationId xmlns:a16="http://schemas.microsoft.com/office/drawing/2014/main" id="{5FB6E3BF-51CF-78EE-4FA8-C9102DF918B9}"/>
+              </a:ext>
+            </a:extLst>
+          </p:cNvPr>
+          <p:cNvSpPr/>
+          <p:nvPr/>
+        </p:nvSpPr>
+        <p:spPr>
+          <a:xfrm>
+            <a:off x="45677" y="163290"/>
+            <a:ext cx="3353985" cy="316961"/>
+          </a:xfrm>
+          <a:prstGeom prst="rect">
+            <a:avLst/>
+          </a:prstGeom>
+          <a:ln>
+            <a:noFill/>
+          </a:ln>
+        </p:spPr>
+        <p:style>
+          <a:lnRef idx="2">
+            <a:schemeClr val="accent6"/>
+          </a:lnRef>
+          <a:fillRef idx="1">
+            <a:schemeClr val="lt1"/>
+          </a:fillRef>
+          <a:effectRef idx="0">
+            <a:schemeClr val="accent6"/>
+          </a:effectRef>
+          <a:fontRef idx="minor">
+            <a:schemeClr val="dk1"/>
+          </a:fontRef>
+        </p:style>
+        <p:txBody>
+          <a:bodyPr rtlCol="0" anchor="ctr"/>
+          <a:lstStyle/>
+          <a:p>
+            <a:pPr algn="ctr"/>
+            <a:r>
+              <a:rPr lang="en-MY" sz="1400" b="1" dirty="0"/>
+              <a:t>MACHINE LEARNING PIPELINE</a:t>
+            </a:r>
+          </a:p>
+        </p:txBody>
+      </p:sp>
+      <p:sp>
+        <p:nvSpPr>
+          <p:cNvPr id="48" name="Rectangle 47">
+            <a:extLst>
+              <a:ext uri="{FF2B5EF4-FFF2-40B4-BE49-F238E27FC236}">
+                <a16:creationId xmlns:a16="http://schemas.microsoft.com/office/drawing/2014/main" id="{0E2A37EF-F5AC-7249-4426-A2982CEBE2CF}"/>
+              </a:ext>
+            </a:extLst>
+          </p:cNvPr>
+          <p:cNvSpPr/>
+          <p:nvPr/>
+        </p:nvSpPr>
+        <p:spPr>
+          <a:xfrm>
+            <a:off x="5433334" y="1559355"/>
+            <a:ext cx="1352083" cy="460237"/>
+          </a:xfrm>
+          <a:prstGeom prst="rect">
+            <a:avLst/>
+          </a:prstGeom>
+          <a:solidFill>
+            <a:schemeClr val="bg1"/>
+          </a:solidFill>
+        </p:spPr>
+        <p:style>
+          <a:lnRef idx="2">
+            <a:schemeClr val="accent6"/>
+          </a:lnRef>
+          <a:fillRef idx="1">
+            <a:schemeClr val="lt1"/>
+          </a:fillRef>
+          <a:effectRef idx="0">
+            <a:schemeClr val="accent6"/>
+          </a:effectRef>
+          <a:fontRef idx="minor">
+            <a:schemeClr val="dk1"/>
+          </a:fontRef>
+        </p:style>
+        <p:txBody>
+          <a:bodyPr rtlCol="0" anchor="ctr"/>
+          <a:lstStyle/>
+          <a:p>
+            <a:pPr algn="ctr"/>
+            <a:r>
+              <a:rPr lang="en-US" b="1" dirty="0"/>
+              <a:t>ML MODEL</a:t>
+            </a:r>
+            <a:endParaRPr lang="en-MY" b="1" dirty="0"/>
+          </a:p>
+        </p:txBody>
+      </p:sp>
+      <p:sp>
+        <p:nvSpPr>
+          <p:cNvPr id="2" name="Rectangle 1">
+            <a:extLst>
+              <a:ext uri="{FF2B5EF4-FFF2-40B4-BE49-F238E27FC236}">
+                <a16:creationId xmlns:a16="http://schemas.microsoft.com/office/drawing/2014/main" id="{659568AF-D5BB-AD82-2087-B821887A488F}"/>
+              </a:ext>
+            </a:extLst>
+          </p:cNvPr>
+          <p:cNvSpPr/>
+          <p:nvPr/>
+        </p:nvSpPr>
+        <p:spPr>
+          <a:xfrm>
+            <a:off x="-16887" y="730035"/>
+            <a:ext cx="3353985" cy="316961"/>
+          </a:xfrm>
+          <a:prstGeom prst="rect">
+            <a:avLst/>
+          </a:prstGeom>
+          <a:noFill/>
+          <a:ln>
+            <a:noFill/>
+          </a:ln>
+        </p:spPr>
+        <p:style>
+          <a:lnRef idx="2">
+            <a:schemeClr val="accent6"/>
+          </a:lnRef>
+          <a:fillRef idx="1">
+            <a:schemeClr val="lt1"/>
+          </a:fillRef>
+          <a:effectRef idx="0">
+            <a:schemeClr val="accent6"/>
+          </a:effectRef>
+          <a:fontRef idx="minor">
+            <a:schemeClr val="dk1"/>
+          </a:fontRef>
+        </p:style>
+        <p:txBody>
+          <a:bodyPr rtlCol="0" anchor="ctr"/>
+          <a:lstStyle/>
+          <a:p>
+            <a:pPr algn="ctr"/>
+            <a:r>
+              <a:rPr lang="en-MY" sz="1400" dirty="0"/>
+              <a:t>UPDATE ON (20.0.2026)</a:t>
+            </a:r>
+          </a:p>
+        </p:txBody>
+      </p:sp>
+    </p:spTree>
+    <p:extLst>
+      <p:ext uri="{BB962C8B-B14F-4D97-AF65-F5344CB8AC3E}">
+        <p14:creationId xmlns:p14="http://schemas.microsoft.com/office/powerpoint/2010/main" val="971072422"/>
+      </p:ext>
+    </p:extLst>
+  </p:cSld>
+  <p:clrMapOvr>
+    <a:masterClrMapping/>
+  </p:clrMapOvr>
+</p:sld>
+</file>
+
+<file path=ppt/slides/slide3.xml><?xml version="1.0" encoding="utf-8"?>
+<p:sld xmlns:a="http://schemas.openxmlformats.org/drawingml/2006/main" xmlns:r="http://schemas.openxmlformats.org/officeDocument/2006/relationships" xmlns:p="http://schemas.openxmlformats.org/presentationml/2006/main" showMasterSp="0">
+  <p:cSld>
+    <p:bg>
+      <p:bgPr>
+        <a:solidFill>
           <a:schemeClr val="bg1"/>
         </a:solidFill>
         <a:effectLst/>
@@ -7288,7 +9233,7 @@
         </p:nvSpPr>
         <p:spPr>
           <a:xfrm>
-            <a:off x="8279967" y="2315001"/>
+            <a:off x="9021647" y="2315001"/>
             <a:ext cx="1049965" cy="267977"/>
           </a:xfrm>
           <a:prstGeom prst="rect">
@@ -7347,7 +9292,7 @@
         </p:nvSpPr>
         <p:spPr>
           <a:xfrm>
-            <a:off x="8344749" y="2858630"/>
+            <a:off x="9086429" y="2858630"/>
             <a:ext cx="920400" cy="237596"/>
           </a:xfrm>
           <a:prstGeom prst="rect">
@@ -7410,7 +9355,7 @@
         </p:nvCxnSpPr>
         <p:spPr>
           <a:xfrm flipH="1">
-            <a:off x="8804949" y="2582978"/>
+            <a:off x="9546629" y="2582978"/>
             <a:ext cx="1" cy="275652"/>
           </a:xfrm>
           <a:prstGeom prst="straightConnector1">
@@ -7769,7 +9714,7 @@
         </p:nvCxnSpPr>
         <p:spPr>
           <a:xfrm>
-            <a:off x="8804949" y="3096226"/>
+            <a:off x="9546629" y="3096226"/>
             <a:ext cx="0" cy="191980"/>
           </a:xfrm>
           <a:prstGeom prst="straightConnector1">
@@ -7811,7 +9756,7 @@
         </p:nvSpPr>
         <p:spPr>
           <a:xfrm>
-            <a:off x="8344749" y="3288206"/>
+            <a:off x="9086429" y="3288206"/>
             <a:ext cx="920400" cy="237596"/>
           </a:xfrm>
           <a:prstGeom prst="rect">
@@ -8419,6 +10364,170 @@
           </a:p>
         </p:txBody>
       </p:sp>
+      <p:sp>
+        <p:nvSpPr>
+          <p:cNvPr id="2" name="Rectangle 1">
+            <a:extLst>
+              <a:ext uri="{FF2B5EF4-FFF2-40B4-BE49-F238E27FC236}">
+                <a16:creationId xmlns:a16="http://schemas.microsoft.com/office/drawing/2014/main" id="{3F93FB64-D419-E58A-F044-A9F734C4F122}"/>
+              </a:ext>
+            </a:extLst>
+          </p:cNvPr>
+          <p:cNvSpPr/>
+          <p:nvPr/>
+        </p:nvSpPr>
+        <p:spPr>
+          <a:xfrm>
+            <a:off x="7578550" y="2315001"/>
+            <a:ext cx="1247056" cy="267977"/>
+          </a:xfrm>
+          <a:prstGeom prst="rect">
+            <a:avLst/>
+          </a:prstGeom>
+          <a:ln w="6350">
+            <a:solidFill>
+              <a:schemeClr val="tx1"/>
+            </a:solidFill>
+          </a:ln>
+        </p:spPr>
+        <p:style>
+          <a:lnRef idx="2">
+            <a:schemeClr val="accent6"/>
+          </a:lnRef>
+          <a:fillRef idx="1">
+            <a:schemeClr val="lt1"/>
+          </a:fillRef>
+          <a:effectRef idx="0">
+            <a:schemeClr val="accent6"/>
+          </a:effectRef>
+          <a:fontRef idx="minor">
+            <a:schemeClr val="dk1"/>
+          </a:fontRef>
+        </p:style>
+        <p:txBody>
+          <a:bodyPr rtlCol="0" anchor="ctr"/>
+          <a:lstStyle/>
+          <a:p>
+            <a:pPr algn="ctr"/>
+            <a:r>
+              <a:rPr lang="en-US" sz="1200" b="1" noProof="1">
+                <a:latin typeface="Arial" panose="020B0604020202020204" pitchFamily="34" charset="0"/>
+                <a:cs typeface="Arial" panose="020B0604020202020204" pitchFamily="34" charset="0"/>
+              </a:rPr>
+              <a:t>SGD Classifier</a:t>
+            </a:r>
+            <a:endParaRPr lang="en-MY" sz="1100" dirty="0">
+              <a:latin typeface="Arial" panose="020B0604020202020204" pitchFamily="34" charset="0"/>
+              <a:cs typeface="Arial" panose="020B0604020202020204" pitchFamily="34" charset="0"/>
+            </a:endParaRPr>
+          </a:p>
+        </p:txBody>
+      </p:sp>
+      <p:sp>
+        <p:nvSpPr>
+          <p:cNvPr id="5" name="Rectangle 4">
+            <a:extLst>
+              <a:ext uri="{FF2B5EF4-FFF2-40B4-BE49-F238E27FC236}">
+                <a16:creationId xmlns:a16="http://schemas.microsoft.com/office/drawing/2014/main" id="{6AF24791-8CA7-8C60-E9D6-9C21FA1313FF}"/>
+              </a:ext>
+            </a:extLst>
+          </p:cNvPr>
+          <p:cNvSpPr/>
+          <p:nvPr/>
+        </p:nvSpPr>
+        <p:spPr>
+          <a:xfrm>
+            <a:off x="7744932" y="2858630"/>
+            <a:ext cx="920400" cy="237596"/>
+          </a:xfrm>
+          <a:prstGeom prst="rect">
+            <a:avLst/>
+          </a:prstGeom>
+          <a:ln w="6350">
+            <a:solidFill>
+              <a:schemeClr val="tx1"/>
+            </a:solidFill>
+          </a:ln>
+        </p:spPr>
+        <p:style>
+          <a:lnRef idx="2">
+            <a:schemeClr val="accent6"/>
+          </a:lnRef>
+          <a:fillRef idx="1">
+            <a:schemeClr val="lt1"/>
+          </a:fillRef>
+          <a:effectRef idx="0">
+            <a:schemeClr val="accent6"/>
+          </a:effectRef>
+          <a:fontRef idx="minor">
+            <a:schemeClr val="dk1"/>
+          </a:fontRef>
+        </p:style>
+        <p:txBody>
+          <a:bodyPr rtlCol="0" anchor="ctr"/>
+          <a:lstStyle/>
+          <a:p>
+            <a:pPr algn="ctr"/>
+            <a:r>
+              <a:rPr lang="en-US" sz="1200" dirty="0">
+                <a:latin typeface="Arial" panose="020B0604020202020204" pitchFamily="34" charset="0"/>
+                <a:cs typeface="Arial" panose="020B0604020202020204" pitchFamily="34" charset="0"/>
+              </a:rPr>
+              <a:t>Data type</a:t>
+            </a:r>
+            <a:endParaRPr lang="en-MY" sz="1600" dirty="0">
+              <a:latin typeface="Arial" panose="020B0604020202020204" pitchFamily="34" charset="0"/>
+              <a:cs typeface="Arial" panose="020B0604020202020204" pitchFamily="34" charset="0"/>
+            </a:endParaRPr>
+          </a:p>
+        </p:txBody>
+      </p:sp>
+      <p:cxnSp>
+        <p:nvCxnSpPr>
+          <p:cNvPr id="6" name="Straight Arrow Connector 5">
+            <a:extLst>
+              <a:ext uri="{FF2B5EF4-FFF2-40B4-BE49-F238E27FC236}">
+                <a16:creationId xmlns:a16="http://schemas.microsoft.com/office/drawing/2014/main" id="{D3895EBC-EE4A-1C83-51C4-A2C198BC6973}"/>
+              </a:ext>
+            </a:extLst>
+          </p:cNvPr>
+          <p:cNvCxnSpPr>
+            <a:cxnSpLocks/>
+            <a:stCxn id="2" idx="2"/>
+            <a:endCxn id="5" idx="0"/>
+          </p:cNvCxnSpPr>
+          <p:nvPr/>
+        </p:nvCxnSpPr>
+        <p:spPr>
+          <a:xfrm>
+            <a:off x="8202078" y="2582978"/>
+            <a:ext cx="3054" cy="275652"/>
+          </a:xfrm>
+          <a:prstGeom prst="straightConnector1">
+            <a:avLst/>
+          </a:prstGeom>
+          <a:ln>
+            <a:solidFill>
+              <a:schemeClr val="tx2"/>
+            </a:solidFill>
+            <a:tailEnd type="triangle"/>
+          </a:ln>
+        </p:spPr>
+        <p:style>
+          <a:lnRef idx="1">
+            <a:schemeClr val="accent1"/>
+          </a:lnRef>
+          <a:fillRef idx="0">
+            <a:schemeClr val="accent1"/>
+          </a:fillRef>
+          <a:effectRef idx="0">
+            <a:schemeClr val="accent1"/>
+          </a:effectRef>
+          <a:fontRef idx="minor">
+            <a:schemeClr val="tx1"/>
+          </a:fontRef>
+        </p:style>
+      </p:cxnSp>
     </p:spTree>
     <p:extLst>
       <p:ext uri="{BB962C8B-B14F-4D97-AF65-F5344CB8AC3E}">
@@ -8432,7 +10541,7 @@
 </p:sld>
 </file>
 
-<file path=ppt/slides/slide3.xml><?xml version="1.0" encoding="utf-8"?>
+<file path=ppt/slides/slide4.xml><?xml version="1.0" encoding="utf-8"?>
 <p:sld xmlns:a="http://schemas.openxmlformats.org/drawingml/2006/main" xmlns:r="http://schemas.openxmlformats.org/officeDocument/2006/relationships" xmlns:p="http://schemas.openxmlformats.org/presentationml/2006/main" showMasterSp="0">
   <p:cSld>
     <p:bg>

--- a/1.training_model/slide_presentation/Device Identifier 20260520.pptx
+++ b/1.training_model/slide_presentation/Device Identifier 20260520.pptx
@@ -5,13 +5,15 @@
     <p:sldMasterId id="2147483696" r:id="rId1"/>
   </p:sldMasterIdLst>
   <p:notesMasterIdLst>
-    <p:notesMasterId r:id="rId6"/>
+    <p:notesMasterId r:id="rId8"/>
   </p:notesMasterIdLst>
   <p:sldIdLst>
     <p:sldId id="256" r:id="rId2"/>
     <p:sldId id="325" r:id="rId3"/>
     <p:sldId id="292" r:id="rId4"/>
     <p:sldId id="323" r:id="rId5"/>
+    <p:sldId id="327" r:id="rId6"/>
+    <p:sldId id="326" r:id="rId7"/>
   </p:sldIdLst>
   <p:sldSz cx="12192000" cy="6858000"/>
   <p:notesSz cx="6858000" cy="9144000"/>
@@ -200,7 +202,7 @@
           <a:p>
             <a:fld id="{23D8B80A-F233-4240-BDAF-6537AE249829}" type="datetimeFigureOut">
               <a:rPr lang="en-MY" smtClean="0"/>
-              <a:t>20/5/2026</a:t>
+              <a:t>21/5/2026</a:t>
             </a:fld>
             <a:endParaRPr lang="en-MY"/>
           </a:p>
@@ -744,6 +746,114 @@
 </p:notes>
 </file>
 
+<file path=ppt/notesSlides/notesSlide4.xml><?xml version="1.0" encoding="utf-8"?>
+<p:notes xmlns:a="http://schemas.openxmlformats.org/drawingml/2006/main" xmlns:r="http://schemas.openxmlformats.org/officeDocument/2006/relationships" xmlns:p="http://schemas.openxmlformats.org/presentationml/2006/main">
+  <p:cSld>
+    <p:spTree>
+      <p:nvGrpSpPr>
+        <p:cNvPr id="1" name="">
+          <a:extLst>
+            <a:ext uri="{FF2B5EF4-FFF2-40B4-BE49-F238E27FC236}">
+              <a16:creationId xmlns:a16="http://schemas.microsoft.com/office/drawing/2014/main" id="{E96BB1E2-2CB1-5021-75E5-CF6CCD57DE06}"/>
+            </a:ext>
+          </a:extLst>
+        </p:cNvPr>
+        <p:cNvGrpSpPr/>
+        <p:nvPr/>
+      </p:nvGrpSpPr>
+      <p:grpSpPr>
+        <a:xfrm>
+          <a:off x="0" y="0"/>
+          <a:ext cx="0" cy="0"/>
+          <a:chOff x="0" y="0"/>
+          <a:chExt cx="0" cy="0"/>
+        </a:xfrm>
+      </p:grpSpPr>
+      <p:sp>
+        <p:nvSpPr>
+          <p:cNvPr id="2" name="Slide Image Placeholder 1">
+            <a:extLst>
+              <a:ext uri="{FF2B5EF4-FFF2-40B4-BE49-F238E27FC236}">
+                <a16:creationId xmlns:a16="http://schemas.microsoft.com/office/drawing/2014/main" id="{1B700753-6D9B-7CA5-2453-C8409535183B}"/>
+              </a:ext>
+            </a:extLst>
+          </p:cNvPr>
+          <p:cNvSpPr>
+            <a:spLocks noGrp="1" noRot="1" noChangeAspect="1"/>
+          </p:cNvSpPr>
+          <p:nvPr>
+            <p:ph type="sldImg"/>
+          </p:nvPr>
+        </p:nvSpPr>
+        <p:spPr/>
+      </p:sp>
+      <p:sp>
+        <p:nvSpPr>
+          <p:cNvPr id="3" name="Notes Placeholder 2">
+            <a:extLst>
+              <a:ext uri="{FF2B5EF4-FFF2-40B4-BE49-F238E27FC236}">
+                <a16:creationId xmlns:a16="http://schemas.microsoft.com/office/drawing/2014/main" id="{40D44659-0B80-A575-79ED-8829A738DBDB}"/>
+              </a:ext>
+            </a:extLst>
+          </p:cNvPr>
+          <p:cNvSpPr>
+            <a:spLocks noGrp="1"/>
+          </p:cNvSpPr>
+          <p:nvPr>
+            <p:ph type="body" idx="1"/>
+          </p:nvPr>
+        </p:nvSpPr>
+        <p:spPr/>
+        <p:txBody>
+          <a:bodyPr/>
+          <a:lstStyle/>
+          <a:p>
+            <a:endParaRPr lang="en-MY" dirty="0"/>
+          </a:p>
+        </p:txBody>
+      </p:sp>
+      <p:sp>
+        <p:nvSpPr>
+          <p:cNvPr id="4" name="Slide Number Placeholder 3">
+            <a:extLst>
+              <a:ext uri="{FF2B5EF4-FFF2-40B4-BE49-F238E27FC236}">
+                <a16:creationId xmlns:a16="http://schemas.microsoft.com/office/drawing/2014/main" id="{C33108B5-6282-34C4-DE56-EADE451903FF}"/>
+              </a:ext>
+            </a:extLst>
+          </p:cNvPr>
+          <p:cNvSpPr>
+            <a:spLocks noGrp="1"/>
+          </p:cNvSpPr>
+          <p:nvPr>
+            <p:ph type="sldNum" sz="quarter" idx="5"/>
+          </p:nvPr>
+        </p:nvSpPr>
+        <p:spPr/>
+        <p:txBody>
+          <a:bodyPr/>
+          <a:lstStyle/>
+          <a:p>
+            <a:fld id="{D16833E0-5E66-4D1D-89F5-BD860FDD8F71}" type="slidenum">
+              <a:rPr lang="en-MY" smtClean="0"/>
+              <a:t>5</a:t>
+            </a:fld>
+            <a:endParaRPr lang="en-MY"/>
+          </a:p>
+        </p:txBody>
+      </p:sp>
+    </p:spTree>
+    <p:extLst>
+      <p:ext uri="{BB962C8B-B14F-4D97-AF65-F5344CB8AC3E}">
+        <p14:creationId xmlns:p14="http://schemas.microsoft.com/office/powerpoint/2010/main" val="127372749"/>
+      </p:ext>
+    </p:extLst>
+  </p:cSld>
+  <p:clrMapOvr>
+    <a:masterClrMapping/>
+  </p:clrMapOvr>
+</p:notes>
+</file>
+
 <file path=ppt/slideLayouts/slideLayout1.xml><?xml version="1.0" encoding="utf-8"?>
 <p:sldLayout xmlns:a="http://schemas.openxmlformats.org/drawingml/2006/main" xmlns:r="http://schemas.openxmlformats.org/officeDocument/2006/relationships" xmlns:p="http://schemas.openxmlformats.org/presentationml/2006/main" type="title" preserve="1">
   <p:cSld name="Title Slide">
@@ -915,7 +1025,7 @@
           <a:p>
             <a:fld id="{1CD01395-AC05-405C-BAB9-E5D2B9FDBB40}" type="datetimeFigureOut">
               <a:rPr lang="en-MY" smtClean="0"/>
-              <a:t>20/5/2026</a:t>
+              <a:t>21/5/2026</a:t>
             </a:fld>
             <a:endParaRPr lang="en-MY"/>
           </a:p>
@@ -1230,7 +1340,7 @@
           <a:p>
             <a:fld id="{1CD01395-AC05-405C-BAB9-E5D2B9FDBB40}" type="datetimeFigureOut">
               <a:rPr lang="en-MY" smtClean="0"/>
-              <a:t>20/5/2026</a:t>
+              <a:t>21/5/2026</a:t>
             </a:fld>
             <a:endParaRPr lang="en-MY"/>
           </a:p>
@@ -1452,7 +1562,7 @@
           <a:p>
             <a:fld id="{1CD01395-AC05-405C-BAB9-E5D2B9FDBB40}" type="datetimeFigureOut">
               <a:rPr lang="en-MY" smtClean="0"/>
-              <a:t>20/5/2026</a:t>
+              <a:t>21/5/2026</a:t>
             </a:fld>
             <a:endParaRPr lang="en-MY"/>
           </a:p>
@@ -1743,7 +1853,7 @@
           <a:p>
             <a:fld id="{1CD01395-AC05-405C-BAB9-E5D2B9FDBB40}" type="datetimeFigureOut">
               <a:rPr lang="en-MY" smtClean="0"/>
-              <a:t>20/5/2026</a:t>
+              <a:t>21/5/2026</a:t>
             </a:fld>
             <a:endParaRPr lang="en-MY"/>
           </a:p>
@@ -2197,7 +2307,7 @@
           <a:p>
             <a:fld id="{1CD01395-AC05-405C-BAB9-E5D2B9FDBB40}" type="datetimeFigureOut">
               <a:rPr lang="en-MY" smtClean="0"/>
-              <a:t>20/5/2026</a:t>
+              <a:t>21/5/2026</a:t>
             </a:fld>
             <a:endParaRPr lang="en-MY"/>
           </a:p>
@@ -2773,7 +2883,7 @@
           <a:p>
             <a:fld id="{1CD01395-AC05-405C-BAB9-E5D2B9FDBB40}" type="datetimeFigureOut">
               <a:rPr lang="en-MY" smtClean="0"/>
-              <a:t>20/5/2026</a:t>
+              <a:t>21/5/2026</a:t>
             </a:fld>
             <a:endParaRPr lang="en-MY"/>
           </a:p>
@@ -3634,7 +3744,7 @@
           <a:p>
             <a:fld id="{1CD01395-AC05-405C-BAB9-E5D2B9FDBB40}" type="datetimeFigureOut">
               <a:rPr lang="en-MY" smtClean="0"/>
-              <a:t>20/5/2026</a:t>
+              <a:t>21/5/2026</a:t>
             </a:fld>
             <a:endParaRPr lang="en-MY"/>
           </a:p>
@@ -3839,7 +3949,7 @@
           <a:p>
             <a:fld id="{1CD01395-AC05-405C-BAB9-E5D2B9FDBB40}" type="datetimeFigureOut">
               <a:rPr lang="en-MY" smtClean="0"/>
-              <a:t>20/5/2026</a:t>
+              <a:t>21/5/2026</a:t>
             </a:fld>
             <a:endParaRPr lang="en-MY"/>
           </a:p>
@@ -4053,7 +4163,7 @@
           <a:p>
             <a:fld id="{1CD01395-AC05-405C-BAB9-E5D2B9FDBB40}" type="datetimeFigureOut">
               <a:rPr lang="en-MY" smtClean="0"/>
-              <a:t>20/5/2026</a:t>
+              <a:t>21/5/2026</a:t>
             </a:fld>
             <a:endParaRPr lang="en-MY"/>
           </a:p>
@@ -4258,7 +4368,7 @@
           <a:p>
             <a:fld id="{1CD01395-AC05-405C-BAB9-E5D2B9FDBB40}" type="datetimeFigureOut">
               <a:rPr lang="en-MY" smtClean="0"/>
-              <a:t>20/5/2026</a:t>
+              <a:t>21/5/2026</a:t>
             </a:fld>
             <a:endParaRPr lang="en-MY"/>
           </a:p>
@@ -4538,7 +4648,7 @@
           <a:p>
             <a:fld id="{1CD01395-AC05-405C-BAB9-E5D2B9FDBB40}" type="datetimeFigureOut">
               <a:rPr lang="en-MY" smtClean="0"/>
-              <a:t>20/5/2026</a:t>
+              <a:t>21/5/2026</a:t>
             </a:fld>
             <a:endParaRPr lang="en-MY"/>
           </a:p>
@@ -4805,7 +4915,7 @@
           <a:p>
             <a:fld id="{1CD01395-AC05-405C-BAB9-E5D2B9FDBB40}" type="datetimeFigureOut">
               <a:rPr lang="en-MY" smtClean="0"/>
-              <a:t>20/5/2026</a:t>
+              <a:t>21/5/2026</a:t>
             </a:fld>
             <a:endParaRPr lang="en-MY"/>
           </a:p>
@@ -5220,7 +5330,7 @@
           <a:p>
             <a:fld id="{1CD01395-AC05-405C-BAB9-E5D2B9FDBB40}" type="datetimeFigureOut">
               <a:rPr lang="en-MY" smtClean="0"/>
-              <a:t>20/5/2026</a:t>
+              <a:t>21/5/2026</a:t>
             </a:fld>
             <a:endParaRPr lang="en-MY"/>
           </a:p>
@@ -5368,7 +5478,7 @@
           <a:p>
             <a:fld id="{1CD01395-AC05-405C-BAB9-E5D2B9FDBB40}" type="datetimeFigureOut">
               <a:rPr lang="en-MY" smtClean="0"/>
-              <a:t>20/5/2026</a:t>
+              <a:t>21/5/2026</a:t>
             </a:fld>
             <a:endParaRPr lang="en-MY"/>
           </a:p>
@@ -5493,7 +5603,7 @@
           <a:p>
             <a:fld id="{1CD01395-AC05-405C-BAB9-E5D2B9FDBB40}" type="datetimeFigureOut">
               <a:rPr lang="en-MY" smtClean="0"/>
-              <a:t>20/5/2026</a:t>
+              <a:t>21/5/2026</a:t>
             </a:fld>
             <a:endParaRPr lang="en-MY"/>
           </a:p>
@@ -5772,7 +5882,7 @@
           <a:p>
             <a:fld id="{1CD01395-AC05-405C-BAB9-E5D2B9FDBB40}" type="datetimeFigureOut">
               <a:rPr lang="en-MY" smtClean="0"/>
-              <a:t>20/5/2026</a:t>
+              <a:t>21/5/2026</a:t>
             </a:fld>
             <a:endParaRPr lang="en-MY"/>
           </a:p>
@@ -6087,7 +6197,7 @@
           <a:p>
             <a:fld id="{1CD01395-AC05-405C-BAB9-E5D2B9FDBB40}" type="datetimeFigureOut">
               <a:rPr lang="en-MY" smtClean="0"/>
-              <a:t>20/5/2026</a:t>
+              <a:t>21/5/2026</a:t>
             </a:fld>
             <a:endParaRPr lang="en-MY"/>
           </a:p>
@@ -6340,7 +6450,7 @@
           <a:p>
             <a:fld id="{1CD01395-AC05-405C-BAB9-E5D2B9FDBB40}" type="datetimeFigureOut">
               <a:rPr lang="en-MY" smtClean="0"/>
-              <a:t>20/5/2026</a:t>
+              <a:t>21/5/2026</a:t>
             </a:fld>
             <a:endParaRPr lang="en-MY"/>
           </a:p>
@@ -10667,6 +10777,165 @@
     <p:extLst>
       <p:ext uri="{BB962C8B-B14F-4D97-AF65-F5344CB8AC3E}">
         <p14:creationId xmlns:p14="http://schemas.microsoft.com/office/powerpoint/2010/main" val="16583078"/>
+      </p:ext>
+    </p:extLst>
+  </p:cSld>
+  <p:clrMapOvr>
+    <a:masterClrMapping/>
+  </p:clrMapOvr>
+</p:sld>
+</file>
+
+<file path=ppt/slides/slide5.xml><?xml version="1.0" encoding="utf-8"?>
+<p:sld xmlns:a="http://schemas.openxmlformats.org/drawingml/2006/main" xmlns:r="http://schemas.openxmlformats.org/officeDocument/2006/relationships" xmlns:p="http://schemas.openxmlformats.org/presentationml/2006/main" showMasterSp="0">
+  <p:cSld>
+    <p:bg>
+      <p:bgPr>
+        <a:solidFill>
+          <a:srgbClr val="CDF6F9"/>
+        </a:solidFill>
+        <a:effectLst/>
+      </p:bgPr>
+    </p:bg>
+    <p:spTree>
+      <p:nvGrpSpPr>
+        <p:cNvPr id="1" name="">
+          <a:extLst>
+            <a:ext uri="{FF2B5EF4-FFF2-40B4-BE49-F238E27FC236}">
+              <a16:creationId xmlns:a16="http://schemas.microsoft.com/office/drawing/2014/main" id="{700F46A2-011D-3546-0B8A-E87BD8F1A4B0}"/>
+            </a:ext>
+          </a:extLst>
+        </p:cNvPr>
+        <p:cNvGrpSpPr/>
+        <p:nvPr/>
+      </p:nvGrpSpPr>
+      <p:grpSpPr>
+        <a:xfrm>
+          <a:off x="0" y="0"/>
+          <a:ext cx="0" cy="0"/>
+          <a:chOff x="0" y="0"/>
+          <a:chExt cx="0" cy="0"/>
+        </a:xfrm>
+      </p:grpSpPr>
+      <p:sp>
+        <p:nvSpPr>
+          <p:cNvPr id="2" name="TextBox 1">
+            <a:extLst>
+              <a:ext uri="{FF2B5EF4-FFF2-40B4-BE49-F238E27FC236}">
+                <a16:creationId xmlns:a16="http://schemas.microsoft.com/office/drawing/2014/main" id="{D2532F23-4670-2ED4-3919-B3B8454E3933}"/>
+              </a:ext>
+            </a:extLst>
+          </p:cNvPr>
+          <p:cNvSpPr txBox="1"/>
+          <p:nvPr/>
+        </p:nvSpPr>
+        <p:spPr>
+          <a:xfrm>
+            <a:off x="4504451" y="960120"/>
+            <a:ext cx="3036793" cy="369332"/>
+          </a:xfrm>
+          <a:prstGeom prst="rect">
+            <a:avLst/>
+          </a:prstGeom>
+          <a:noFill/>
+        </p:spPr>
+        <p:txBody>
+          <a:bodyPr wrap="none" rtlCol="0">
+            <a:spAutoFit/>
+          </a:bodyPr>
+          <a:lstStyle/>
+          <a:p>
+            <a:r>
+              <a:rPr lang="en-US" dirty="0"/>
+              <a:t>HOW TO SORT THE PROJECT?</a:t>
+            </a:r>
+          </a:p>
+        </p:txBody>
+      </p:sp>
+    </p:spTree>
+    <p:extLst>
+      <p:ext uri="{BB962C8B-B14F-4D97-AF65-F5344CB8AC3E}">
+        <p14:creationId xmlns:p14="http://schemas.microsoft.com/office/powerpoint/2010/main" val="975718132"/>
+      </p:ext>
+    </p:extLst>
+  </p:cSld>
+  <p:clrMapOvr>
+    <a:masterClrMapping/>
+  </p:clrMapOvr>
+</p:sld>
+</file>
+
+<file path=ppt/slides/slide6.xml><?xml version="1.0" encoding="utf-8"?>
+<p:sld xmlns:a="http://schemas.openxmlformats.org/drawingml/2006/main" xmlns:r="http://schemas.openxmlformats.org/officeDocument/2006/relationships" xmlns:p="http://schemas.openxmlformats.org/presentationml/2006/main">
+  <p:cSld>
+    <p:spTree>
+      <p:nvGrpSpPr>
+        <p:cNvPr id="1" name=""/>
+        <p:cNvGrpSpPr/>
+        <p:nvPr/>
+      </p:nvGrpSpPr>
+      <p:grpSpPr>
+        <a:xfrm>
+          <a:off x="0" y="0"/>
+          <a:ext cx="0" cy="0"/>
+          <a:chOff x="0" y="0"/>
+          <a:chExt cx="0" cy="0"/>
+        </a:xfrm>
+      </p:grpSpPr>
+      <p:sp>
+        <p:nvSpPr>
+          <p:cNvPr id="2" name="Title 1">
+            <a:extLst>
+              <a:ext uri="{FF2B5EF4-FFF2-40B4-BE49-F238E27FC236}">
+                <a16:creationId xmlns:a16="http://schemas.microsoft.com/office/drawing/2014/main" id="{887D954D-6BAB-E5BB-EDE6-E99E9E8B7146}"/>
+              </a:ext>
+            </a:extLst>
+          </p:cNvPr>
+          <p:cNvSpPr>
+            <a:spLocks noGrp="1"/>
+          </p:cNvSpPr>
+          <p:nvPr>
+            <p:ph type="title"/>
+          </p:nvPr>
+        </p:nvSpPr>
+        <p:spPr/>
+        <p:txBody>
+          <a:bodyPr/>
+          <a:lstStyle/>
+          <a:p>
+            <a:endParaRPr lang="en-MY"/>
+          </a:p>
+        </p:txBody>
+      </p:sp>
+      <p:sp>
+        <p:nvSpPr>
+          <p:cNvPr id="3" name="Content Placeholder 2">
+            <a:extLst>
+              <a:ext uri="{FF2B5EF4-FFF2-40B4-BE49-F238E27FC236}">
+                <a16:creationId xmlns:a16="http://schemas.microsoft.com/office/drawing/2014/main" id="{E3051F36-2B91-1D55-6FDC-91FFF40B05A1}"/>
+              </a:ext>
+            </a:extLst>
+          </p:cNvPr>
+          <p:cNvSpPr>
+            <a:spLocks noGrp="1"/>
+          </p:cNvSpPr>
+          <p:nvPr>
+            <p:ph sz="quarter" idx="13"/>
+          </p:nvPr>
+        </p:nvSpPr>
+        <p:spPr/>
+        <p:txBody>
+          <a:bodyPr/>
+          <a:lstStyle/>
+          <a:p>
+            <a:endParaRPr lang="en-MY"/>
+          </a:p>
+        </p:txBody>
+      </p:sp>
+    </p:spTree>
+    <p:extLst>
+      <p:ext uri="{BB962C8B-B14F-4D97-AF65-F5344CB8AC3E}">
+        <p14:creationId xmlns:p14="http://schemas.microsoft.com/office/powerpoint/2010/main" val="1573312710"/>
       </p:ext>
     </p:extLst>
   </p:cSld>

--- a/1.training_model/slide_presentation/Device Identifier 20260520.pptx
+++ b/1.training_model/slide_presentation/Device Identifier 20260520.pptx
@@ -202,7 +202,7 @@
           <a:p>
             <a:fld id="{23D8B80A-F233-4240-BDAF-6537AE249829}" type="datetimeFigureOut">
               <a:rPr lang="en-MY" smtClean="0"/>
-              <a:t>21/5/2026</a:t>
+              <a:t>9/6/2026</a:t>
             </a:fld>
             <a:endParaRPr lang="en-MY"/>
           </a:p>
@@ -1025,7 +1025,7 @@
           <a:p>
             <a:fld id="{1CD01395-AC05-405C-BAB9-E5D2B9FDBB40}" type="datetimeFigureOut">
               <a:rPr lang="en-MY" smtClean="0"/>
-              <a:t>21/5/2026</a:t>
+              <a:t>9/6/2026</a:t>
             </a:fld>
             <a:endParaRPr lang="en-MY"/>
           </a:p>
@@ -1340,7 +1340,7 @@
           <a:p>
             <a:fld id="{1CD01395-AC05-405C-BAB9-E5D2B9FDBB40}" type="datetimeFigureOut">
               <a:rPr lang="en-MY" smtClean="0"/>
-              <a:t>21/5/2026</a:t>
+              <a:t>9/6/2026</a:t>
             </a:fld>
             <a:endParaRPr lang="en-MY"/>
           </a:p>
@@ -1562,7 +1562,7 @@
           <a:p>
             <a:fld id="{1CD01395-AC05-405C-BAB9-E5D2B9FDBB40}" type="datetimeFigureOut">
               <a:rPr lang="en-MY" smtClean="0"/>
-              <a:t>21/5/2026</a:t>
+              <a:t>9/6/2026</a:t>
             </a:fld>
             <a:endParaRPr lang="en-MY"/>
           </a:p>
@@ -1853,7 +1853,7 @@
           <a:p>
             <a:fld id="{1CD01395-AC05-405C-BAB9-E5D2B9FDBB40}" type="datetimeFigureOut">
               <a:rPr lang="en-MY" smtClean="0"/>
-              <a:t>21/5/2026</a:t>
+              <a:t>9/6/2026</a:t>
             </a:fld>
             <a:endParaRPr lang="en-MY"/>
           </a:p>
@@ -2307,7 +2307,7 @@
           <a:p>
             <a:fld id="{1CD01395-AC05-405C-BAB9-E5D2B9FDBB40}" type="datetimeFigureOut">
               <a:rPr lang="en-MY" smtClean="0"/>
-              <a:t>21/5/2026</a:t>
+              <a:t>9/6/2026</a:t>
             </a:fld>
             <a:endParaRPr lang="en-MY"/>
           </a:p>
@@ -2883,7 +2883,7 @@
           <a:p>
             <a:fld id="{1CD01395-AC05-405C-BAB9-E5D2B9FDBB40}" type="datetimeFigureOut">
               <a:rPr lang="en-MY" smtClean="0"/>
-              <a:t>21/5/2026</a:t>
+              <a:t>9/6/2026</a:t>
             </a:fld>
             <a:endParaRPr lang="en-MY"/>
           </a:p>
@@ -3744,7 +3744,7 @@
           <a:p>
             <a:fld id="{1CD01395-AC05-405C-BAB9-E5D2B9FDBB40}" type="datetimeFigureOut">
               <a:rPr lang="en-MY" smtClean="0"/>
-              <a:t>21/5/2026</a:t>
+              <a:t>9/6/2026</a:t>
             </a:fld>
             <a:endParaRPr lang="en-MY"/>
           </a:p>
@@ -3949,7 +3949,7 @@
           <a:p>
             <a:fld id="{1CD01395-AC05-405C-BAB9-E5D2B9FDBB40}" type="datetimeFigureOut">
               <a:rPr lang="en-MY" smtClean="0"/>
-              <a:t>21/5/2026</a:t>
+              <a:t>9/6/2026</a:t>
             </a:fld>
             <a:endParaRPr lang="en-MY"/>
           </a:p>
@@ -4163,7 +4163,7 @@
           <a:p>
             <a:fld id="{1CD01395-AC05-405C-BAB9-E5D2B9FDBB40}" type="datetimeFigureOut">
               <a:rPr lang="en-MY" smtClean="0"/>
-              <a:t>21/5/2026</a:t>
+              <a:t>9/6/2026</a:t>
             </a:fld>
             <a:endParaRPr lang="en-MY"/>
           </a:p>
@@ -4368,7 +4368,7 @@
           <a:p>
             <a:fld id="{1CD01395-AC05-405C-BAB9-E5D2B9FDBB40}" type="datetimeFigureOut">
               <a:rPr lang="en-MY" smtClean="0"/>
-              <a:t>21/5/2026</a:t>
+              <a:t>9/6/2026</a:t>
             </a:fld>
             <a:endParaRPr lang="en-MY"/>
           </a:p>
@@ -4648,7 +4648,7 @@
           <a:p>
             <a:fld id="{1CD01395-AC05-405C-BAB9-E5D2B9FDBB40}" type="datetimeFigureOut">
               <a:rPr lang="en-MY" smtClean="0"/>
-              <a:t>21/5/2026</a:t>
+              <a:t>9/6/2026</a:t>
             </a:fld>
             <a:endParaRPr lang="en-MY"/>
           </a:p>
@@ -4915,7 +4915,7 @@
           <a:p>
             <a:fld id="{1CD01395-AC05-405C-BAB9-E5D2B9FDBB40}" type="datetimeFigureOut">
               <a:rPr lang="en-MY" smtClean="0"/>
-              <a:t>21/5/2026</a:t>
+              <a:t>9/6/2026</a:t>
             </a:fld>
             <a:endParaRPr lang="en-MY"/>
           </a:p>
@@ -5330,7 +5330,7 @@
           <a:p>
             <a:fld id="{1CD01395-AC05-405C-BAB9-E5D2B9FDBB40}" type="datetimeFigureOut">
               <a:rPr lang="en-MY" smtClean="0"/>
-              <a:t>21/5/2026</a:t>
+              <a:t>9/6/2026</a:t>
             </a:fld>
             <a:endParaRPr lang="en-MY"/>
           </a:p>
@@ -5478,7 +5478,7 @@
           <a:p>
             <a:fld id="{1CD01395-AC05-405C-BAB9-E5D2B9FDBB40}" type="datetimeFigureOut">
               <a:rPr lang="en-MY" smtClean="0"/>
-              <a:t>21/5/2026</a:t>
+              <a:t>9/6/2026</a:t>
             </a:fld>
             <a:endParaRPr lang="en-MY"/>
           </a:p>
@@ -5603,7 +5603,7 @@
           <a:p>
             <a:fld id="{1CD01395-AC05-405C-BAB9-E5D2B9FDBB40}" type="datetimeFigureOut">
               <a:rPr lang="en-MY" smtClean="0"/>
-              <a:t>21/5/2026</a:t>
+              <a:t>9/6/2026</a:t>
             </a:fld>
             <a:endParaRPr lang="en-MY"/>
           </a:p>
@@ -5882,7 +5882,7 @@
           <a:p>
             <a:fld id="{1CD01395-AC05-405C-BAB9-E5D2B9FDBB40}" type="datetimeFigureOut">
               <a:rPr lang="en-MY" smtClean="0"/>
-              <a:t>21/5/2026</a:t>
+              <a:t>9/6/2026</a:t>
             </a:fld>
             <a:endParaRPr lang="en-MY"/>
           </a:p>
@@ -6197,7 +6197,7 @@
           <a:p>
             <a:fld id="{1CD01395-AC05-405C-BAB9-E5D2B9FDBB40}" type="datetimeFigureOut">
               <a:rPr lang="en-MY" smtClean="0"/>
-              <a:t>21/5/2026</a:t>
+              <a:t>9/6/2026</a:t>
             </a:fld>
             <a:endParaRPr lang="en-MY"/>
           </a:p>
@@ -6450,7 +6450,7 @@
           <a:p>
             <a:fld id="{1CD01395-AC05-405C-BAB9-E5D2B9FDBB40}" type="datetimeFigureOut">
               <a:rPr lang="en-MY" smtClean="0"/>
-              <a:t>21/5/2026</a:t>
+              <a:t>9/6/2026</a:t>
             </a:fld>
             <a:endParaRPr lang="en-MY"/>
           </a:p>
@@ -10852,6 +10852,42 @@
           </a:p>
         </p:txBody>
       </p:sp>
+      <p:pic>
+        <p:nvPicPr>
+          <p:cNvPr id="4" name="Picture 3">
+            <a:extLst>
+              <a:ext uri="{FF2B5EF4-FFF2-40B4-BE49-F238E27FC236}">
+                <a16:creationId xmlns:a16="http://schemas.microsoft.com/office/drawing/2014/main" id="{590A2A64-8894-0919-1FE3-D9F8E44114DA}"/>
+              </a:ext>
+            </a:extLst>
+          </p:cNvPr>
+          <p:cNvPicPr>
+            <a:picLocks noChangeAspect="1"/>
+          </p:cNvPicPr>
+          <p:nvPr/>
+        </p:nvPicPr>
+        <p:blipFill>
+          <a:blip r:embed="rId3">
+            <a:extLst>
+              <a:ext uri="{28A0092B-C50C-407E-A947-70E740481C1C}">
+                <a14:useLocalDpi xmlns:a14="http://schemas.microsoft.com/office/drawing/2010/main" val="0"/>
+              </a:ext>
+            </a:extLst>
+          </a:blip>
+          <a:stretch>
+            <a:fillRect/>
+          </a:stretch>
+        </p:blipFill>
+        <p:spPr>
+          <a:xfrm>
+            <a:off x="240299" y="230886"/>
+            <a:ext cx="4264152" cy="6396228"/>
+          </a:xfrm>
+          <a:prstGeom prst="rect">
+            <a:avLst/>
+          </a:prstGeom>
+        </p:spPr>
+      </p:pic>
     </p:spTree>
     <p:extLst>
       <p:ext uri="{BB962C8B-B14F-4D97-AF65-F5344CB8AC3E}">
